--- a/pptx/03 Pandas.pptx
+++ b/pptx/03 Pandas.pptx
@@ -43,21 +43,21 @@
       <p:boldItalic r:id="rId26"/>
     </p:embeddedFont>
     <p:embeddedFont>
-      <p:font typeface="Roboto Condensed" panose="02000000000000000000" pitchFamily="2" charset="0"/>
+      <p:font typeface="Roboto Condensed" panose="020F0502020204030204" pitchFamily="2" charset="0"/>
       <p:regular r:id="rId27"/>
       <p:bold r:id="rId28"/>
       <p:italic r:id="rId29"/>
       <p:boldItalic r:id="rId30"/>
     </p:embeddedFont>
     <p:embeddedFont>
-      <p:font typeface="Roboto Condensed Light" panose="02000000000000000000" pitchFamily="2" charset="0"/>
+      <p:font typeface="Roboto Condensed Light" panose="020F0502020204030204" pitchFamily="2" charset="0"/>
       <p:regular r:id="rId31"/>
       <p:bold r:id="rId32"/>
       <p:italic r:id="rId33"/>
       <p:boldItalic r:id="rId34"/>
     </p:embeddedFont>
     <p:embeddedFont>
-      <p:font typeface="Roboto Mono" panose="00000009000000000000" pitchFamily="49" charset="0"/>
+      <p:font typeface="Roboto Mono" panose="020F0502020204030204" pitchFamily="49" charset="0"/>
       <p:regular r:id="rId35"/>
       <p:bold r:id="rId36"/>
       <p:italic r:id="rId37"/>
@@ -11749,7 +11749,7 @@
               <a:buNone/>
             </a:pPr>
             <a:r>
-              <a:rPr lang="en" sz="1200" dirty="0">
+              <a:rPr lang="en" sz="1200" strike="sngStrike" dirty="0">
                 <a:solidFill>
                   <a:schemeClr val="accent1"/>
                 </a:solidFill>
@@ -11760,7 +11760,7 @@
               </a:rPr>
               <a:t>3.1 – Ensembling Learning</a:t>
             </a:r>
-            <a:endParaRPr sz="1200" dirty="0">
+            <a:endParaRPr sz="1200" strike="sngStrike" dirty="0">
               <a:solidFill>
                 <a:schemeClr val="accent1"/>
               </a:solidFill>
@@ -11844,7 +11844,7 @@
               <a:buNone/>
             </a:pPr>
             <a:r>
-              <a:rPr lang="en" sz="1100" dirty="0">
+              <a:rPr lang="en" sz="1100" strike="sngStrike" dirty="0">
                 <a:solidFill>
                   <a:schemeClr val="accent1"/>
                 </a:solidFill>
@@ -11853,7 +11853,7 @@
               <a:t>4</a:t>
             </a:r>
             <a:r>
-              <a:rPr lang="en" sz="1200" dirty="0">
+              <a:rPr lang="en" sz="1200" strike="sngStrike" dirty="0">
                 <a:solidFill>
                   <a:schemeClr val="accent1"/>
                 </a:solidFill>
@@ -11861,7 +11861,7 @@
               </a:rPr>
               <a:t>.* - Natural Language Processing (NLP)</a:t>
             </a:r>
-            <a:endParaRPr sz="1200" dirty="0">
+            <a:endParaRPr sz="1200" strike="sngStrike" dirty="0">
               <a:solidFill>
                 <a:schemeClr val="accent1"/>
               </a:solidFill>
@@ -11985,7 +11985,7 @@
               <a:buNone/>
             </a:pPr>
             <a:r>
-              <a:rPr lang="en" sz="1100" dirty="0">
+              <a:rPr lang="en" sz="1100" strike="sngStrike" dirty="0">
                 <a:solidFill>
                   <a:schemeClr val="accent1"/>
                 </a:solidFill>
@@ -11993,7 +11993,7 @@
               </a:rPr>
               <a:t>2.5 - KNN</a:t>
             </a:r>
-            <a:endParaRPr sz="1100" dirty="0">
+            <a:endParaRPr sz="1100" strike="sngStrike" dirty="0">
               <a:solidFill>
                 <a:schemeClr val="accent1"/>
               </a:solidFill>
@@ -12037,7 +12037,7 @@
           <a:p>
             <a:pPr algn="ctr"/>
             <a:r>
-              <a:rPr lang="en" sz="1200" dirty="0">
+              <a:rPr lang="en" sz="1200" strike="sngStrike" dirty="0">
                 <a:solidFill>
                   <a:schemeClr val="accent1"/>
                 </a:solidFill>
@@ -12045,7 +12045,7 @@
               </a:rPr>
               <a:t>3.2 - Neural Networks</a:t>
             </a:r>
-            <a:endParaRPr sz="1200" dirty="0">
+            <a:endParaRPr sz="1200" strike="sngStrike" dirty="0">
               <a:solidFill>
                 <a:schemeClr val="accent1"/>
               </a:solidFill>

--- a/pptx/03 Pandas.pptx
+++ b/pptx/03 Pandas.pptx
@@ -23,7 +23,7 @@
     <p:sldId id="267" r:id="rId14"/>
     <p:sldId id="268" r:id="rId15"/>
     <p:sldId id="269" r:id="rId16"/>
-    <p:sldId id="310" r:id="rId17"/>
+    <p:sldId id="312" r:id="rId17"/>
   </p:sldIdLst>
   <p:sldSz cx="9144000" cy="5143500" type="screen16x9"/>
   <p:notesSz cx="6858000" cy="9144000"/>
@@ -43,21 +43,21 @@
       <p:boldItalic r:id="rId26"/>
     </p:embeddedFont>
     <p:embeddedFont>
-      <p:font typeface="Roboto Condensed" panose="020F0502020204030204" pitchFamily="2" charset="0"/>
+      <p:font typeface="Roboto Condensed" panose="02000000000000000000" pitchFamily="2" charset="0"/>
       <p:regular r:id="rId27"/>
       <p:bold r:id="rId28"/>
       <p:italic r:id="rId29"/>
       <p:boldItalic r:id="rId30"/>
     </p:embeddedFont>
     <p:embeddedFont>
-      <p:font typeface="Roboto Condensed Light" panose="020F0502020204030204" pitchFamily="2" charset="0"/>
+      <p:font typeface="Roboto Condensed Light" panose="02000000000000000000" pitchFamily="2" charset="0"/>
       <p:regular r:id="rId31"/>
       <p:bold r:id="rId32"/>
       <p:italic r:id="rId33"/>
       <p:boldItalic r:id="rId34"/>
     </p:embeddedFont>
     <p:embeddedFont>
-      <p:font typeface="Roboto Mono" panose="020F0502020204030204" pitchFamily="49" charset="0"/>
+      <p:font typeface="Roboto Mono" panose="00000009000000000000" pitchFamily="49" charset="0"/>
       <p:regular r:id="rId35"/>
       <p:bold r:id="rId36"/>
       <p:italic r:id="rId37"/>
@@ -1481,110 +1481,6 @@
 </p:notes>
 </file>
 
-<file path=ppt/notesSlides/notesSlide16.xml><?xml version="1.0" encoding="utf-8"?>
-<p:notes xmlns:a="http://schemas.openxmlformats.org/drawingml/2006/main" xmlns:r="http://schemas.openxmlformats.org/officeDocument/2006/relationships" xmlns:p="http://schemas.openxmlformats.org/presentationml/2006/main" showMasterSp="0" showMasterPhAnim="0">
-  <p:cSld>
-    <p:spTree>
-      <p:nvGrpSpPr>
-        <p:cNvPr id="1" name="Shape 274"/>
-        <p:cNvGrpSpPr/>
-        <p:nvPr/>
-      </p:nvGrpSpPr>
-      <p:grpSpPr>
-        <a:xfrm>
-          <a:off x="0" y="0"/>
-          <a:ext cx="0" cy="0"/>
-          <a:chOff x="0" y="0"/>
-          <a:chExt cx="0" cy="0"/>
-        </a:xfrm>
-      </p:grpSpPr>
-      <p:sp>
-        <p:nvSpPr>
-          <p:cNvPr id="275" name="Google Shape;275;gef2bb6bc3d_0_0:notes"/>
-          <p:cNvSpPr>
-            <a:spLocks noGrp="1" noRot="1" noChangeAspect="1"/>
-          </p:cNvSpPr>
-          <p:nvPr>
-            <p:ph type="sldImg" idx="2"/>
-          </p:nvPr>
-        </p:nvSpPr>
-        <p:spPr>
-          <a:xfrm>
-            <a:off x="381000" y="685800"/>
-            <a:ext cx="6096000" cy="3429000"/>
-          </a:xfrm>
-          <a:custGeom>
-            <a:avLst/>
-            <a:gdLst/>
-            <a:ahLst/>
-            <a:cxnLst/>
-            <a:rect l="l" t="t" r="r" b="b"/>
-            <a:pathLst>
-              <a:path w="120000" h="120000" extrusionOk="0">
-                <a:moveTo>
-                  <a:pt x="0" y="0"/>
-                </a:moveTo>
-                <a:lnTo>
-                  <a:pt x="120000" y="0"/>
-                </a:lnTo>
-                <a:lnTo>
-                  <a:pt x="120000" y="120000"/>
-                </a:lnTo>
-                <a:lnTo>
-                  <a:pt x="0" y="120000"/>
-                </a:lnTo>
-                <a:close/>
-              </a:path>
-            </a:pathLst>
-          </a:custGeom>
-        </p:spPr>
-      </p:sp>
-      <p:sp>
-        <p:nvSpPr>
-          <p:cNvPr id="276" name="Google Shape;276;gef2bb6bc3d_0_0:notes"/>
-          <p:cNvSpPr txBox="1">
-            <a:spLocks noGrp="1"/>
-          </p:cNvSpPr>
-          <p:nvPr>
-            <p:ph type="body" idx="1"/>
-          </p:nvPr>
-        </p:nvSpPr>
-        <p:spPr>
-          <a:xfrm>
-            <a:off x="685800" y="4343400"/>
-            <a:ext cx="5486400" cy="4114800"/>
-          </a:xfrm>
-          <a:prstGeom prst="rect">
-            <a:avLst/>
-          </a:prstGeom>
-        </p:spPr>
-        <p:txBody>
-          <a:bodyPr spcFirstLastPara="1" wrap="square" lIns="91425" tIns="91425" rIns="91425" bIns="91425" anchor="t" anchorCtr="0">
-            <a:noAutofit/>
-          </a:bodyPr>
-          <a:lstStyle/>
-          <a:p>
-            <a:pPr marL="0" lvl="0" indent="0" algn="l" rtl="0">
-              <a:spcBef>
-                <a:spcPts val="0"/>
-              </a:spcBef>
-              <a:spcAft>
-                <a:spcPts val="0"/>
-              </a:spcAft>
-              <a:buNone/>
-            </a:pPr>
-            <a:endParaRPr/>
-          </a:p>
-        </p:txBody>
-      </p:sp>
-    </p:spTree>
-  </p:cSld>
-  <p:clrMapOvr>
-    <a:masterClrMapping/>
-  </p:clrMapOvr>
-</p:notes>
-</file>
-
 <file path=ppt/notesSlides/notesSlide2.xml><?xml version="1.0" encoding="utf-8"?>
 <p:notes xmlns:a="http://schemas.openxmlformats.org/drawingml/2006/main" xmlns:r="http://schemas.openxmlformats.org/officeDocument/2006/relationships" xmlns:p="http://schemas.openxmlformats.org/presentationml/2006/main" showMasterSp="0" showMasterPhAnim="0">
   <p:cSld>
@@ -7695,160 +7591,6 @@
 </file>
 
 <file path=ppt/slideLayouts/slideLayout7.xml><?xml version="1.0" encoding="utf-8"?>
-<p:sldLayout xmlns:a="http://schemas.openxmlformats.org/drawingml/2006/main" xmlns:r="http://schemas.openxmlformats.org/officeDocument/2006/relationships" xmlns:p="http://schemas.openxmlformats.org/presentationml/2006/main" matchingName="Big title">
-  <p:cSld name="CUSTOM_29">
-    <p:spTree>
-      <p:nvGrpSpPr>
-        <p:cNvPr id="1" name="Shape 104"/>
-        <p:cNvGrpSpPr/>
-        <p:nvPr/>
-      </p:nvGrpSpPr>
-      <p:grpSpPr>
-        <a:xfrm>
-          <a:off x="0" y="0"/>
-          <a:ext cx="0" cy="0"/>
-          <a:chOff x="0" y="0"/>
-          <a:chExt cx="0" cy="0"/>
-        </a:xfrm>
-      </p:grpSpPr>
-      <p:sp>
-        <p:nvSpPr>
-          <p:cNvPr id="105" name="Google Shape;105;p17"/>
-          <p:cNvSpPr txBox="1">
-            <a:spLocks noGrp="1"/>
-          </p:cNvSpPr>
-          <p:nvPr>
-            <p:ph type="ctrTitle"/>
-          </p:nvPr>
-        </p:nvSpPr>
-        <p:spPr>
-          <a:xfrm flipH="1">
-            <a:off x="1193529" y="1611150"/>
-            <a:ext cx="5195700" cy="1921200"/>
-          </a:xfrm>
-          <a:prstGeom prst="rect">
-            <a:avLst/>
-          </a:prstGeom>
-        </p:spPr>
-        <p:txBody>
-          <a:bodyPr spcFirstLastPara="1" wrap="square" lIns="91425" tIns="91425" rIns="91425" bIns="91425" anchor="ctr" anchorCtr="0">
-            <a:noAutofit/>
-          </a:bodyPr>
-          <a:lstStyle>
-            <a:lvl1pPr lvl="0" rtl="0">
-              <a:spcBef>
-                <a:spcPts val="0"/>
-              </a:spcBef>
-              <a:spcAft>
-                <a:spcPts val="0"/>
-              </a:spcAft>
-              <a:buSzPts val="3600"/>
-              <a:buNone/>
-              <a:defRPr sz="3600"/>
-            </a:lvl1pPr>
-            <a:lvl2pPr lvl="1" rtl="0">
-              <a:spcBef>
-                <a:spcPts val="0"/>
-              </a:spcBef>
-              <a:spcAft>
-                <a:spcPts val="0"/>
-              </a:spcAft>
-              <a:buSzPts val="6500"/>
-              <a:buNone/>
-              <a:defRPr sz="6500"/>
-            </a:lvl2pPr>
-            <a:lvl3pPr lvl="2" rtl="0">
-              <a:spcBef>
-                <a:spcPts val="0"/>
-              </a:spcBef>
-              <a:spcAft>
-                <a:spcPts val="0"/>
-              </a:spcAft>
-              <a:buSzPts val="6500"/>
-              <a:buNone/>
-              <a:defRPr sz="6500"/>
-            </a:lvl3pPr>
-            <a:lvl4pPr lvl="3" rtl="0">
-              <a:spcBef>
-                <a:spcPts val="0"/>
-              </a:spcBef>
-              <a:spcAft>
-                <a:spcPts val="0"/>
-              </a:spcAft>
-              <a:buSzPts val="6500"/>
-              <a:buNone/>
-              <a:defRPr sz="6500"/>
-            </a:lvl4pPr>
-            <a:lvl5pPr lvl="4" rtl="0">
-              <a:spcBef>
-                <a:spcPts val="0"/>
-              </a:spcBef>
-              <a:spcAft>
-                <a:spcPts val="0"/>
-              </a:spcAft>
-              <a:buSzPts val="6500"/>
-              <a:buNone/>
-              <a:defRPr sz="6500"/>
-            </a:lvl5pPr>
-            <a:lvl6pPr lvl="5" rtl="0">
-              <a:spcBef>
-                <a:spcPts val="0"/>
-              </a:spcBef>
-              <a:spcAft>
-                <a:spcPts val="0"/>
-              </a:spcAft>
-              <a:buSzPts val="6500"/>
-              <a:buNone/>
-              <a:defRPr sz="6500"/>
-            </a:lvl6pPr>
-            <a:lvl7pPr lvl="6" rtl="0">
-              <a:spcBef>
-                <a:spcPts val="0"/>
-              </a:spcBef>
-              <a:spcAft>
-                <a:spcPts val="0"/>
-              </a:spcAft>
-              <a:buSzPts val="6500"/>
-              <a:buNone/>
-              <a:defRPr sz="6500"/>
-            </a:lvl7pPr>
-            <a:lvl8pPr lvl="7" rtl="0">
-              <a:spcBef>
-                <a:spcPts val="0"/>
-              </a:spcBef>
-              <a:spcAft>
-                <a:spcPts val="0"/>
-              </a:spcAft>
-              <a:buSzPts val="6500"/>
-              <a:buNone/>
-              <a:defRPr sz="6500"/>
-            </a:lvl8pPr>
-            <a:lvl9pPr lvl="8" rtl="0">
-              <a:spcBef>
-                <a:spcPts val="0"/>
-              </a:spcBef>
-              <a:spcAft>
-                <a:spcPts val="0"/>
-              </a:spcAft>
-              <a:buSzPts val="6500"/>
-              <a:buNone/>
-              <a:defRPr sz="6500"/>
-            </a:lvl9pPr>
-          </a:lstStyle>
-          <a:p>
-            <a:endParaRPr/>
-          </a:p>
-        </p:txBody>
-      </p:sp>
-    </p:spTree>
-  </p:cSld>
-  <p:clrMapOvr>
-    <a:masterClrMapping/>
-  </p:clrMapOvr>
-</p:sldLayout>
-</file>
-
-<file path=ppt/slideLayouts/slideLayout8.xml><?xml version="1.0" encoding="utf-8"?>
 <p:sldLayout xmlns:a="http://schemas.openxmlformats.org/drawingml/2006/main" xmlns:r="http://schemas.openxmlformats.org/officeDocument/2006/relationships" xmlns:p="http://schemas.openxmlformats.org/presentationml/2006/main" matchingName="Title + text">
   <p:cSld name="CUSTOM_14">
     <p:bg>
@@ -8144,7 +7886,7 @@
 </p:sldLayout>
 </file>
 
-<file path=ppt/slideLayouts/slideLayout9.xml><?xml version="1.0" encoding="utf-8"?>
+<file path=ppt/slideLayouts/slideLayout8.xml><?xml version="1.0" encoding="utf-8"?>
 <p:sldLayout xmlns:a="http://schemas.openxmlformats.org/drawingml/2006/main" xmlns:r="http://schemas.openxmlformats.org/officeDocument/2006/relationships" xmlns:p="http://schemas.openxmlformats.org/presentationml/2006/main" matchingName="Blank slide">
   <p:cSld name="CUSTOM_33">
     <p:bg>
@@ -8719,9 +8461,8 @@
     <p:sldLayoutId id="2147483652" r:id="rId4"/>
     <p:sldLayoutId id="2147483653" r:id="rId5"/>
     <p:sldLayoutId id="2147483657" r:id="rId6"/>
-    <p:sldLayoutId id="2147483663" r:id="rId7"/>
-    <p:sldLayoutId id="2147483670" r:id="rId8"/>
-    <p:sldLayoutId id="2147483671" r:id="rId9"/>
+    <p:sldLayoutId id="2147483670" r:id="rId7"/>
+    <p:sldLayoutId id="2147483671" r:id="rId8"/>
   </p:sldLayoutIdLst>
   <p:hf hdr="0" ftr="0" dt="0"/>
   <p:txStyles>
@@ -10796,7 +10537,7 @@
   <p:cSld>
     <p:spTree>
       <p:nvGrpSpPr>
-        <p:cNvPr id="1" name="Shape 277"/>
+        <p:cNvPr id="1" name=""/>
         <p:cNvGrpSpPr/>
         <p:nvPr/>
       </p:nvGrpSpPr>
@@ -10810,47 +10551,90 @@
       </p:grpSpPr>
       <p:sp>
         <p:nvSpPr>
-          <p:cNvPr id="278" name="Google Shape;278;p50"/>
-          <p:cNvSpPr txBox="1">
+          <p:cNvPr id="2" name="Textplatzhalter 1">
+            <a:extLst>
+              <a:ext uri="{FF2B5EF4-FFF2-40B4-BE49-F238E27FC236}">
+                <a16:creationId xmlns:a16="http://schemas.microsoft.com/office/drawing/2014/main" id="{7CF3D243-ACB9-287A-C421-4BFC45695594}"/>
+              </a:ext>
+            </a:extLst>
+          </p:cNvPr>
+          <p:cNvSpPr>
+            <a:spLocks noGrp="1"/>
+          </p:cNvSpPr>
+          <p:nvPr>
+            <p:ph type="body" idx="1"/>
+          </p:nvPr>
+        </p:nvSpPr>
+        <p:spPr/>
+        <p:txBody>
+          <a:bodyPr/>
+          <a:lstStyle/>
+          <a:p>
+            <a:pPr marL="152400" indent="0">
+              <a:buNone/>
+            </a:pPr>
+            <a:r>
+              <a:rPr lang="de-DE" sz="3600" b="1" dirty="0" err="1">
+                <a:latin typeface="Exo 2"/>
+                <a:sym typeface="Exo 2"/>
+              </a:rPr>
+              <a:t>Thank</a:t>
+            </a:r>
+            <a:r>
+              <a:rPr lang="de-DE" sz="3600" b="1" dirty="0">
+                <a:latin typeface="Exo 2"/>
+                <a:sym typeface="Exo 2"/>
+              </a:rPr>
+              <a:t> </a:t>
+            </a:r>
+            <a:r>
+              <a:rPr lang="de-DE" sz="3600" b="1" dirty="0" err="1">
+                <a:latin typeface="Exo 2"/>
+                <a:sym typeface="Exo 2"/>
+              </a:rPr>
+              <a:t>you</a:t>
+            </a:r>
+            <a:r>
+              <a:rPr lang="de-DE" sz="3600" b="1" dirty="0">
+                <a:latin typeface="Exo 2"/>
+                <a:sym typeface="Exo 2"/>
+              </a:rPr>
+              <a:t>!</a:t>
+            </a:r>
+          </a:p>
+        </p:txBody>
+      </p:sp>
+      <p:sp>
+        <p:nvSpPr>
+          <p:cNvPr id="3" name="Titel 2">
+            <a:extLst>
+              <a:ext uri="{FF2B5EF4-FFF2-40B4-BE49-F238E27FC236}">
+                <a16:creationId xmlns:a16="http://schemas.microsoft.com/office/drawing/2014/main" id="{1A38E729-1ED8-1466-565B-98B582A545EC}"/>
+              </a:ext>
+            </a:extLst>
+          </p:cNvPr>
+          <p:cNvSpPr>
             <a:spLocks noGrp="1"/>
           </p:cNvSpPr>
           <p:nvPr>
             <p:ph type="ctrTitle"/>
           </p:nvPr>
         </p:nvSpPr>
-        <p:spPr>
-          <a:xfrm flipH="1">
-            <a:off x="1193529" y="1611150"/>
-            <a:ext cx="5195700" cy="1921200"/>
-          </a:xfrm>
-          <a:prstGeom prst="rect">
-            <a:avLst/>
-          </a:prstGeom>
-        </p:spPr>
+        <p:spPr/>
         <p:txBody>
-          <a:bodyPr spcFirstLastPara="1" wrap="square" lIns="91425" tIns="91425" rIns="91425" bIns="91425" anchor="ctr" anchorCtr="0">
-            <a:noAutofit/>
-          </a:bodyPr>
+          <a:bodyPr/>
           <a:lstStyle/>
           <a:p>
-            <a:pPr marL="0" lvl="0" indent="0" algn="l" rtl="0">
-              <a:spcBef>
-                <a:spcPts val="0"/>
-              </a:spcBef>
-              <a:spcAft>
-                <a:spcPts val="0"/>
-              </a:spcAft>
-              <a:buNone/>
-            </a:pPr>
-            <a:r>
-              <a:rPr lang="en"/>
-              <a:t>Thank you!</a:t>
-            </a:r>
-            <a:endParaRPr/>
+            <a:endParaRPr lang="de-DE" dirty="0"/>
           </a:p>
         </p:txBody>
       </p:sp>
     </p:spTree>
+    <p:extLst>
+      <p:ext uri="{BB962C8B-B14F-4D97-AF65-F5344CB8AC3E}">
+        <p14:creationId xmlns:p14="http://schemas.microsoft.com/office/powerpoint/2010/main" val="701074718"/>
+      </p:ext>
+    </p:extLst>
   </p:cSld>
   <p:clrMapOvr>
     <a:masterClrMapping/>

--- a/pptx/03 Pandas.pptx
+++ b/pptx/03 Pandas.pptx
@@ -5,7 +5,7 @@
     <p:sldMasterId id="2147483674" r:id="rId1"/>
   </p:sldMasterIdLst>
   <p:notesMasterIdLst>
-    <p:notesMasterId r:id="rId18"/>
+    <p:notesMasterId r:id="rId21"/>
   </p:notesMasterIdLst>
   <p:sldIdLst>
     <p:sldId id="256" r:id="rId2"/>
@@ -23,45 +23,48 @@
     <p:sldId id="267" r:id="rId14"/>
     <p:sldId id="268" r:id="rId15"/>
     <p:sldId id="269" r:id="rId16"/>
-    <p:sldId id="312" r:id="rId17"/>
+    <p:sldId id="313" r:id="rId17"/>
+    <p:sldId id="315" r:id="rId18"/>
+    <p:sldId id="314" r:id="rId19"/>
+    <p:sldId id="312" r:id="rId20"/>
   </p:sldIdLst>
   <p:sldSz cx="9144000" cy="5143500" type="screen16x9"/>
-  <p:notesSz cx="6858000" cy="9144000"/>
+  <p:notesSz cx="6794500" cy="9931400"/>
   <p:embeddedFontLst>
     <p:embeddedFont>
       <p:font typeface="Exo 2" panose="020B0604020202020204" charset="0"/>
-      <p:regular r:id="rId19"/>
-      <p:bold r:id="rId20"/>
-      <p:italic r:id="rId21"/>
-      <p:boldItalic r:id="rId22"/>
+      <p:regular r:id="rId22"/>
+      <p:bold r:id="rId23"/>
+      <p:italic r:id="rId24"/>
+      <p:boldItalic r:id="rId25"/>
     </p:embeddedFont>
     <p:embeddedFont>
       <p:font typeface="Fira Sans Extra Condensed Medium" panose="020B0604020202020204" charset="0"/>
-      <p:regular r:id="rId23"/>
-      <p:bold r:id="rId24"/>
-      <p:italic r:id="rId25"/>
-      <p:boldItalic r:id="rId26"/>
+      <p:regular r:id="rId26"/>
+      <p:bold r:id="rId27"/>
+      <p:italic r:id="rId28"/>
+      <p:boldItalic r:id="rId29"/>
     </p:embeddedFont>
     <p:embeddedFont>
       <p:font typeface="Roboto Condensed" panose="02000000000000000000" pitchFamily="2" charset="0"/>
-      <p:regular r:id="rId27"/>
-      <p:bold r:id="rId28"/>
-      <p:italic r:id="rId29"/>
-      <p:boldItalic r:id="rId30"/>
+      <p:regular r:id="rId30"/>
+      <p:bold r:id="rId31"/>
+      <p:italic r:id="rId32"/>
+      <p:boldItalic r:id="rId33"/>
     </p:embeddedFont>
     <p:embeddedFont>
       <p:font typeface="Roboto Condensed Light" panose="02000000000000000000" pitchFamily="2" charset="0"/>
-      <p:regular r:id="rId31"/>
-      <p:bold r:id="rId32"/>
-      <p:italic r:id="rId33"/>
-      <p:boldItalic r:id="rId34"/>
+      <p:regular r:id="rId34"/>
+      <p:bold r:id="rId35"/>
+      <p:italic r:id="rId36"/>
+      <p:boldItalic r:id="rId37"/>
     </p:embeddedFont>
     <p:embeddedFont>
       <p:font typeface="Roboto Mono" panose="00000009000000000000" pitchFamily="49" charset="0"/>
-      <p:regular r:id="rId35"/>
-      <p:bold r:id="rId36"/>
-      <p:italic r:id="rId37"/>
-      <p:boldItalic r:id="rId38"/>
+      <p:regular r:id="rId38"/>
+      <p:bold r:id="rId39"/>
+      <p:italic r:id="rId40"/>
+      <p:boldItalic r:id="rId41"/>
     </p:embeddedFont>
   </p:embeddedFontLst>
   <p:defaultTextStyle>
@@ -346,8 +349,8 @@
         </p:nvSpPr>
         <p:spPr>
           <a:xfrm>
-            <a:off x="381300" y="685800"/>
-            <a:ext cx="6096075" cy="3429000"/>
+            <a:off x="87313" y="744538"/>
+            <a:ext cx="6619875" cy="3724275"/>
           </a:xfrm>
           <a:custGeom>
             <a:avLst/>
@@ -397,8 +400,8 @@
         </p:nvSpPr>
         <p:spPr>
           <a:xfrm>
-            <a:off x="685800" y="4343400"/>
-            <a:ext cx="5486400" cy="4114800"/>
+            <a:off x="679450" y="4717415"/>
+            <a:ext cx="5435600" cy="4469130"/>
           </a:xfrm>
           <a:prstGeom prst="rect">
             <a:avLst/>
@@ -782,8 +785,8 @@
         </p:nvSpPr>
         <p:spPr>
           <a:xfrm>
-            <a:off x="381000" y="685800"/>
-            <a:ext cx="6096000" cy="3429000"/>
+            <a:off x="87313" y="744538"/>
+            <a:ext cx="6619875" cy="3724275"/>
           </a:xfrm>
           <a:custGeom>
             <a:avLst/>
@@ -823,8 +826,8 @@
         </p:nvSpPr>
         <p:spPr>
           <a:xfrm>
-            <a:off x="685800" y="4343400"/>
-            <a:ext cx="5486400" cy="4114800"/>
+            <a:off x="679450" y="4717415"/>
+            <a:ext cx="5435600" cy="4469130"/>
           </a:xfrm>
           <a:prstGeom prst="rect">
             <a:avLst/>
@@ -886,8 +889,8 @@
         </p:nvSpPr>
         <p:spPr>
           <a:xfrm>
-            <a:off x="381000" y="685800"/>
-            <a:ext cx="6096000" cy="3429000"/>
+            <a:off x="87313" y="744538"/>
+            <a:ext cx="6619875" cy="3724275"/>
           </a:xfrm>
           <a:custGeom>
             <a:avLst/>
@@ -927,8 +930,8 @@
         </p:nvSpPr>
         <p:spPr>
           <a:xfrm>
-            <a:off x="685800" y="4343400"/>
-            <a:ext cx="5486400" cy="4114800"/>
+            <a:off x="679450" y="4717415"/>
+            <a:ext cx="5435600" cy="4469130"/>
           </a:xfrm>
           <a:prstGeom prst="rect">
             <a:avLst/>
@@ -990,8 +993,8 @@
         </p:nvSpPr>
         <p:spPr>
           <a:xfrm>
-            <a:off x="381000" y="685800"/>
-            <a:ext cx="6096000" cy="3429000"/>
+            <a:off x="87313" y="744538"/>
+            <a:ext cx="6619875" cy="3724275"/>
           </a:xfrm>
           <a:custGeom>
             <a:avLst/>
@@ -1031,8 +1034,8 @@
         </p:nvSpPr>
         <p:spPr>
           <a:xfrm>
-            <a:off x="685800" y="4343400"/>
-            <a:ext cx="5486400" cy="4114800"/>
+            <a:off x="679450" y="4717415"/>
+            <a:ext cx="5435600" cy="4469130"/>
           </a:xfrm>
           <a:prstGeom prst="rect">
             <a:avLst/>
@@ -1094,8 +1097,8 @@
         </p:nvSpPr>
         <p:spPr>
           <a:xfrm>
-            <a:off x="381000" y="685800"/>
-            <a:ext cx="6096000" cy="3429000"/>
+            <a:off x="87313" y="744538"/>
+            <a:ext cx="6619875" cy="3724275"/>
           </a:xfrm>
           <a:custGeom>
             <a:avLst/>
@@ -1135,8 +1138,8 @@
         </p:nvSpPr>
         <p:spPr>
           <a:xfrm>
-            <a:off x="685800" y="4343400"/>
-            <a:ext cx="5486400" cy="4114800"/>
+            <a:off x="679450" y="4717415"/>
+            <a:ext cx="5435600" cy="4469130"/>
           </a:xfrm>
           <a:prstGeom prst="rect">
             <a:avLst/>
@@ -1198,8 +1201,8 @@
         </p:nvSpPr>
         <p:spPr>
           <a:xfrm>
-            <a:off x="381000" y="685800"/>
-            <a:ext cx="6096000" cy="3429000"/>
+            <a:off x="87313" y="744538"/>
+            <a:ext cx="6619875" cy="3724275"/>
           </a:xfrm>
           <a:custGeom>
             <a:avLst/>
@@ -1239,8 +1242,8 @@
         </p:nvSpPr>
         <p:spPr>
           <a:xfrm>
-            <a:off x="685800" y="4343400"/>
-            <a:ext cx="5486400" cy="4114800"/>
+            <a:off x="679450" y="4717415"/>
+            <a:ext cx="5435600" cy="4469130"/>
           </a:xfrm>
           <a:prstGeom prst="rect">
             <a:avLst/>
@@ -1302,8 +1305,8 @@
         </p:nvSpPr>
         <p:spPr>
           <a:xfrm>
-            <a:off x="381000" y="685800"/>
-            <a:ext cx="6096000" cy="3429000"/>
+            <a:off x="87313" y="744538"/>
+            <a:ext cx="6619875" cy="3724275"/>
           </a:xfrm>
           <a:custGeom>
             <a:avLst/>
@@ -1343,8 +1346,8 @@
         </p:nvSpPr>
         <p:spPr>
           <a:xfrm>
-            <a:off x="685800" y="4343400"/>
-            <a:ext cx="5486400" cy="4114800"/>
+            <a:off x="679450" y="4717415"/>
+            <a:ext cx="5435600" cy="4469130"/>
           </a:xfrm>
           <a:prstGeom prst="rect">
             <a:avLst/>
@@ -1406,8 +1409,8 @@
         </p:nvSpPr>
         <p:spPr>
           <a:xfrm>
-            <a:off x="381000" y="685800"/>
-            <a:ext cx="6096000" cy="3429000"/>
+            <a:off x="87313" y="744538"/>
+            <a:ext cx="6619875" cy="3724275"/>
           </a:xfrm>
           <a:custGeom>
             <a:avLst/>
@@ -1447,8 +1450,8 @@
         </p:nvSpPr>
         <p:spPr>
           <a:xfrm>
-            <a:off x="685800" y="4343400"/>
-            <a:ext cx="5486400" cy="4114800"/>
+            <a:off x="679450" y="4717415"/>
+            <a:ext cx="5435600" cy="4469130"/>
           </a:xfrm>
           <a:prstGeom prst="rect">
             <a:avLst/>
@@ -1474,6 +1477,448 @@
         </p:txBody>
       </p:sp>
     </p:spTree>
+  </p:cSld>
+  <p:clrMapOvr>
+    <a:masterClrMapping/>
+  </p:clrMapOvr>
+</p:notes>
+</file>
+
+<file path=ppt/notesSlides/notesSlide16.xml><?xml version="1.0" encoding="utf-8"?>
+<p:notes xmlns:a="http://schemas.openxmlformats.org/drawingml/2006/main" xmlns:r="http://schemas.openxmlformats.org/officeDocument/2006/relationships" xmlns:p="http://schemas.openxmlformats.org/presentationml/2006/main" showMasterSp="0" showMasterPhAnim="0">
+  <p:cSld>
+    <p:spTree>
+      <p:nvGrpSpPr>
+        <p:cNvPr id="1" name="Shape 228">
+          <a:extLst>
+            <a:ext uri="{FF2B5EF4-FFF2-40B4-BE49-F238E27FC236}">
+              <a16:creationId xmlns:a16="http://schemas.microsoft.com/office/drawing/2014/main" id="{A3E16044-A869-2B3A-675C-C3260A0742D5}"/>
+            </a:ext>
+          </a:extLst>
+        </p:cNvPr>
+        <p:cNvGrpSpPr/>
+        <p:nvPr/>
+      </p:nvGrpSpPr>
+      <p:grpSpPr>
+        <a:xfrm>
+          <a:off x="0" y="0"/>
+          <a:ext cx="0" cy="0"/>
+          <a:chOff x="0" y="0"/>
+          <a:chExt cx="0" cy="0"/>
+        </a:xfrm>
+      </p:grpSpPr>
+      <p:sp>
+        <p:nvSpPr>
+          <p:cNvPr id="229" name="Google Shape;229;gf1ecca6d32_0_20:notes">
+            <a:extLst>
+              <a:ext uri="{FF2B5EF4-FFF2-40B4-BE49-F238E27FC236}">
+                <a16:creationId xmlns:a16="http://schemas.microsoft.com/office/drawing/2014/main" id="{A226B44B-5BE7-7834-B12B-03BC6F128183}"/>
+              </a:ext>
+            </a:extLst>
+          </p:cNvPr>
+          <p:cNvSpPr>
+            <a:spLocks noGrp="1" noRot="1" noChangeAspect="1"/>
+          </p:cNvSpPr>
+          <p:nvPr>
+            <p:ph type="sldImg" idx="2"/>
+          </p:nvPr>
+        </p:nvSpPr>
+        <p:spPr>
+          <a:xfrm>
+            <a:off x="87313" y="744538"/>
+            <a:ext cx="6619875" cy="3724275"/>
+          </a:xfrm>
+          <a:custGeom>
+            <a:avLst/>
+            <a:gdLst/>
+            <a:ahLst/>
+            <a:cxnLst/>
+            <a:rect l="l" t="t" r="r" b="b"/>
+            <a:pathLst>
+              <a:path w="120000" h="120000" extrusionOk="0">
+                <a:moveTo>
+                  <a:pt x="0" y="0"/>
+                </a:moveTo>
+                <a:lnTo>
+                  <a:pt x="120000" y="0"/>
+                </a:lnTo>
+                <a:lnTo>
+                  <a:pt x="120000" y="120000"/>
+                </a:lnTo>
+                <a:lnTo>
+                  <a:pt x="0" y="120000"/>
+                </a:lnTo>
+                <a:close/>
+              </a:path>
+            </a:pathLst>
+          </a:custGeom>
+        </p:spPr>
+      </p:sp>
+      <p:sp>
+        <p:nvSpPr>
+          <p:cNvPr id="230" name="Google Shape;230;gf1ecca6d32_0_20:notes">
+            <a:extLst>
+              <a:ext uri="{FF2B5EF4-FFF2-40B4-BE49-F238E27FC236}">
+                <a16:creationId xmlns:a16="http://schemas.microsoft.com/office/drawing/2014/main" id="{BEC31F4A-6E91-BF86-8068-7608F897B3B3}"/>
+              </a:ext>
+            </a:extLst>
+          </p:cNvPr>
+          <p:cNvSpPr txBox="1">
+            <a:spLocks noGrp="1"/>
+          </p:cNvSpPr>
+          <p:nvPr>
+            <p:ph type="body" idx="1"/>
+          </p:nvPr>
+        </p:nvSpPr>
+        <p:spPr>
+          <a:xfrm>
+            <a:off x="679450" y="4717415"/>
+            <a:ext cx="5435600" cy="4469130"/>
+          </a:xfrm>
+          <a:prstGeom prst="rect">
+            <a:avLst/>
+          </a:prstGeom>
+        </p:spPr>
+        <p:txBody>
+          <a:bodyPr spcFirstLastPara="1" wrap="square" lIns="91425" tIns="91425" rIns="91425" bIns="91425" anchor="t" anchorCtr="0">
+            <a:noAutofit/>
+          </a:bodyPr>
+          <a:lstStyle/>
+          <a:p>
+            <a:pPr marL="0" lvl="0" indent="0" algn="l" rtl="0">
+              <a:spcBef>
+                <a:spcPts val="0"/>
+              </a:spcBef>
+              <a:spcAft>
+                <a:spcPts val="0"/>
+              </a:spcAft>
+              <a:buNone/>
+            </a:pPr>
+            <a:endParaRPr/>
+          </a:p>
+        </p:txBody>
+      </p:sp>
+    </p:spTree>
+    <p:extLst>
+      <p:ext uri="{BB962C8B-B14F-4D97-AF65-F5344CB8AC3E}">
+        <p14:creationId xmlns:p14="http://schemas.microsoft.com/office/powerpoint/2010/main" val="1515006700"/>
+      </p:ext>
+    </p:extLst>
+  </p:cSld>
+  <p:clrMapOvr>
+    <a:masterClrMapping/>
+  </p:clrMapOvr>
+</p:notes>
+</file>
+
+<file path=ppt/notesSlides/notesSlide17.xml><?xml version="1.0" encoding="utf-8"?>
+<p:notes xmlns:a="http://schemas.openxmlformats.org/drawingml/2006/main" xmlns:r="http://schemas.openxmlformats.org/officeDocument/2006/relationships" xmlns:p="http://schemas.openxmlformats.org/presentationml/2006/main" showMasterSp="0" showMasterPhAnim="0">
+  <p:cSld>
+    <p:spTree>
+      <p:nvGrpSpPr>
+        <p:cNvPr id="1" name="Shape 228">
+          <a:extLst>
+            <a:ext uri="{FF2B5EF4-FFF2-40B4-BE49-F238E27FC236}">
+              <a16:creationId xmlns:a16="http://schemas.microsoft.com/office/drawing/2014/main" id="{99C9AB7A-FCC3-6158-03C9-446DA9538A68}"/>
+            </a:ext>
+          </a:extLst>
+        </p:cNvPr>
+        <p:cNvGrpSpPr/>
+        <p:nvPr/>
+      </p:nvGrpSpPr>
+      <p:grpSpPr>
+        <a:xfrm>
+          <a:off x="0" y="0"/>
+          <a:ext cx="0" cy="0"/>
+          <a:chOff x="0" y="0"/>
+          <a:chExt cx="0" cy="0"/>
+        </a:xfrm>
+      </p:grpSpPr>
+      <p:sp>
+        <p:nvSpPr>
+          <p:cNvPr id="229" name="Google Shape;229;gf1ecca6d32_0_20:notes">
+            <a:extLst>
+              <a:ext uri="{FF2B5EF4-FFF2-40B4-BE49-F238E27FC236}">
+                <a16:creationId xmlns:a16="http://schemas.microsoft.com/office/drawing/2014/main" id="{9F81224A-2EA8-DFF3-A353-8C9DC51DD7FE}"/>
+              </a:ext>
+            </a:extLst>
+          </p:cNvPr>
+          <p:cNvSpPr>
+            <a:spLocks noGrp="1" noRot="1" noChangeAspect="1"/>
+          </p:cNvSpPr>
+          <p:nvPr>
+            <p:ph type="sldImg" idx="2"/>
+          </p:nvPr>
+        </p:nvSpPr>
+        <p:spPr>
+          <a:xfrm>
+            <a:off x="87313" y="744538"/>
+            <a:ext cx="6619875" cy="3724275"/>
+          </a:xfrm>
+          <a:custGeom>
+            <a:avLst/>
+            <a:gdLst/>
+            <a:ahLst/>
+            <a:cxnLst/>
+            <a:rect l="l" t="t" r="r" b="b"/>
+            <a:pathLst>
+              <a:path w="120000" h="120000" extrusionOk="0">
+                <a:moveTo>
+                  <a:pt x="0" y="0"/>
+                </a:moveTo>
+                <a:lnTo>
+                  <a:pt x="120000" y="0"/>
+                </a:lnTo>
+                <a:lnTo>
+                  <a:pt x="120000" y="120000"/>
+                </a:lnTo>
+                <a:lnTo>
+                  <a:pt x="0" y="120000"/>
+                </a:lnTo>
+                <a:close/>
+              </a:path>
+            </a:pathLst>
+          </a:custGeom>
+        </p:spPr>
+      </p:sp>
+      <p:sp>
+        <p:nvSpPr>
+          <p:cNvPr id="230" name="Google Shape;230;gf1ecca6d32_0_20:notes">
+            <a:extLst>
+              <a:ext uri="{FF2B5EF4-FFF2-40B4-BE49-F238E27FC236}">
+                <a16:creationId xmlns:a16="http://schemas.microsoft.com/office/drawing/2014/main" id="{6C593059-69D8-B649-F9FD-2D5445D4C2B4}"/>
+              </a:ext>
+            </a:extLst>
+          </p:cNvPr>
+          <p:cNvSpPr txBox="1">
+            <a:spLocks noGrp="1"/>
+          </p:cNvSpPr>
+          <p:nvPr>
+            <p:ph type="body" idx="1"/>
+          </p:nvPr>
+        </p:nvSpPr>
+        <p:spPr>
+          <a:xfrm>
+            <a:off x="679450" y="4717415"/>
+            <a:ext cx="5435600" cy="4469130"/>
+          </a:xfrm>
+          <a:prstGeom prst="rect">
+            <a:avLst/>
+          </a:prstGeom>
+        </p:spPr>
+        <p:txBody>
+          <a:bodyPr spcFirstLastPara="1" wrap="square" lIns="91425" tIns="91425" rIns="91425" bIns="91425" anchor="t" anchorCtr="0">
+            <a:noAutofit/>
+          </a:bodyPr>
+          <a:lstStyle/>
+          <a:p>
+            <a:pPr marL="0" lvl="0" indent="0" algn="l" rtl="0">
+              <a:spcBef>
+                <a:spcPts val="0"/>
+              </a:spcBef>
+              <a:spcAft>
+                <a:spcPts val="0"/>
+              </a:spcAft>
+              <a:buNone/>
+            </a:pPr>
+            <a:endParaRPr/>
+          </a:p>
+        </p:txBody>
+      </p:sp>
+    </p:spTree>
+    <p:extLst>
+      <p:ext uri="{BB962C8B-B14F-4D97-AF65-F5344CB8AC3E}">
+        <p14:creationId xmlns:p14="http://schemas.microsoft.com/office/powerpoint/2010/main" val="3364787645"/>
+      </p:ext>
+    </p:extLst>
+  </p:cSld>
+  <p:clrMapOvr>
+    <a:masterClrMapping/>
+  </p:clrMapOvr>
+</p:notes>
+</file>
+
+<file path=ppt/notesSlides/notesSlide18.xml><?xml version="1.0" encoding="utf-8"?>
+<p:notes xmlns:a="http://schemas.openxmlformats.org/drawingml/2006/main" xmlns:r="http://schemas.openxmlformats.org/officeDocument/2006/relationships" xmlns:p="http://schemas.openxmlformats.org/presentationml/2006/main" showMasterSp="0" showMasterPhAnim="0">
+  <p:cSld>
+    <p:spTree>
+      <p:nvGrpSpPr>
+        <p:cNvPr id="1" name="Shape 228">
+          <a:extLst>
+            <a:ext uri="{FF2B5EF4-FFF2-40B4-BE49-F238E27FC236}">
+              <a16:creationId xmlns:a16="http://schemas.microsoft.com/office/drawing/2014/main" id="{F1D3540F-9072-0EEE-E7E7-CC1F7785FB04}"/>
+            </a:ext>
+          </a:extLst>
+        </p:cNvPr>
+        <p:cNvGrpSpPr/>
+        <p:nvPr/>
+      </p:nvGrpSpPr>
+      <p:grpSpPr>
+        <a:xfrm>
+          <a:off x="0" y="0"/>
+          <a:ext cx="0" cy="0"/>
+          <a:chOff x="0" y="0"/>
+          <a:chExt cx="0" cy="0"/>
+        </a:xfrm>
+      </p:grpSpPr>
+      <p:sp>
+        <p:nvSpPr>
+          <p:cNvPr id="229" name="Google Shape;229;gf1ecca6d32_0_20:notes">
+            <a:extLst>
+              <a:ext uri="{FF2B5EF4-FFF2-40B4-BE49-F238E27FC236}">
+                <a16:creationId xmlns:a16="http://schemas.microsoft.com/office/drawing/2014/main" id="{668A2B68-BC87-E62A-3142-5B13804F16C9}"/>
+              </a:ext>
+            </a:extLst>
+          </p:cNvPr>
+          <p:cNvSpPr>
+            <a:spLocks noGrp="1" noRot="1" noChangeAspect="1"/>
+          </p:cNvSpPr>
+          <p:nvPr>
+            <p:ph type="sldImg" idx="2"/>
+          </p:nvPr>
+        </p:nvSpPr>
+        <p:spPr>
+          <a:xfrm>
+            <a:off x="87313" y="744538"/>
+            <a:ext cx="6619875" cy="3724275"/>
+          </a:xfrm>
+          <a:custGeom>
+            <a:avLst/>
+            <a:gdLst/>
+            <a:ahLst/>
+            <a:cxnLst/>
+            <a:rect l="l" t="t" r="r" b="b"/>
+            <a:pathLst>
+              <a:path w="120000" h="120000" extrusionOk="0">
+                <a:moveTo>
+                  <a:pt x="0" y="0"/>
+                </a:moveTo>
+                <a:lnTo>
+                  <a:pt x="120000" y="0"/>
+                </a:lnTo>
+                <a:lnTo>
+                  <a:pt x="120000" y="120000"/>
+                </a:lnTo>
+                <a:lnTo>
+                  <a:pt x="0" y="120000"/>
+                </a:lnTo>
+                <a:close/>
+              </a:path>
+            </a:pathLst>
+          </a:custGeom>
+        </p:spPr>
+      </p:sp>
+      <p:sp>
+        <p:nvSpPr>
+          <p:cNvPr id="230" name="Google Shape;230;gf1ecca6d32_0_20:notes">
+            <a:extLst>
+              <a:ext uri="{FF2B5EF4-FFF2-40B4-BE49-F238E27FC236}">
+                <a16:creationId xmlns:a16="http://schemas.microsoft.com/office/drawing/2014/main" id="{1036B70F-E9D5-6541-11A5-0EA461AA86F5}"/>
+              </a:ext>
+            </a:extLst>
+          </p:cNvPr>
+          <p:cNvSpPr txBox="1">
+            <a:spLocks noGrp="1"/>
+          </p:cNvSpPr>
+          <p:nvPr>
+            <p:ph type="body" idx="1"/>
+          </p:nvPr>
+        </p:nvSpPr>
+        <p:spPr>
+          <a:xfrm>
+            <a:off x="679450" y="4717415"/>
+            <a:ext cx="5435600" cy="4469130"/>
+          </a:xfrm>
+          <a:prstGeom prst="rect">
+            <a:avLst/>
+          </a:prstGeom>
+        </p:spPr>
+        <p:txBody>
+          <a:bodyPr spcFirstLastPara="1" wrap="square" lIns="91425" tIns="91425" rIns="91425" bIns="91425" anchor="t" anchorCtr="0">
+            <a:noAutofit/>
+          </a:bodyPr>
+          <a:lstStyle/>
+          <a:p>
+            <a:pPr marL="0" lvl="0" indent="0" algn="l" rtl="0">
+              <a:spcBef>
+                <a:spcPts val="0"/>
+              </a:spcBef>
+              <a:spcAft>
+                <a:spcPts val="0"/>
+              </a:spcAft>
+              <a:buNone/>
+            </a:pPr>
+            <a:endParaRPr/>
+          </a:p>
+        </p:txBody>
+      </p:sp>
+    </p:spTree>
+    <p:extLst>
+      <p:ext uri="{BB962C8B-B14F-4D97-AF65-F5344CB8AC3E}">
+        <p14:creationId xmlns:p14="http://schemas.microsoft.com/office/powerpoint/2010/main" val="2971187557"/>
+      </p:ext>
+    </p:extLst>
+  </p:cSld>
+  <p:clrMapOvr>
+    <a:masterClrMapping/>
+  </p:clrMapOvr>
+</p:notes>
+</file>
+
+<file path=ppt/notesSlides/notesSlide19.xml><?xml version="1.0" encoding="utf-8"?>
+<p:notes xmlns:a="http://schemas.openxmlformats.org/drawingml/2006/main" xmlns:r="http://schemas.openxmlformats.org/officeDocument/2006/relationships" xmlns:p="http://schemas.openxmlformats.org/presentationml/2006/main">
+  <p:cSld>
+    <p:spTree>
+      <p:nvGrpSpPr>
+        <p:cNvPr id="1" name=""/>
+        <p:cNvGrpSpPr/>
+        <p:nvPr/>
+      </p:nvGrpSpPr>
+      <p:grpSpPr>
+        <a:xfrm>
+          <a:off x="0" y="0"/>
+          <a:ext cx="0" cy="0"/>
+          <a:chOff x="0" y="0"/>
+          <a:chExt cx="0" cy="0"/>
+        </a:xfrm>
+      </p:grpSpPr>
+      <p:sp>
+        <p:nvSpPr>
+          <p:cNvPr id="2" name="Folienbildplatzhalter 1"/>
+          <p:cNvSpPr>
+            <a:spLocks noGrp="1" noRot="1" noChangeAspect="1"/>
+          </p:cNvSpPr>
+          <p:nvPr>
+            <p:ph type="sldImg"/>
+          </p:nvPr>
+        </p:nvSpPr>
+        <p:spPr/>
+      </p:sp>
+      <p:sp>
+        <p:nvSpPr>
+          <p:cNvPr id="3" name="Notizenplatzhalter 2"/>
+          <p:cNvSpPr>
+            <a:spLocks noGrp="1"/>
+          </p:cNvSpPr>
+          <p:nvPr>
+            <p:ph type="body" idx="1"/>
+          </p:nvPr>
+        </p:nvSpPr>
+        <p:spPr/>
+        <p:txBody>
+          <a:bodyPr/>
+          <a:lstStyle/>
+          <a:p>
+            <a:endParaRPr lang="de-DE"/>
+          </a:p>
+        </p:txBody>
+      </p:sp>
+    </p:spTree>
+    <p:extLst>
+      <p:ext uri="{BB962C8B-B14F-4D97-AF65-F5344CB8AC3E}">
+        <p14:creationId xmlns:p14="http://schemas.microsoft.com/office/powerpoint/2010/main" val="28909812"/>
+      </p:ext>
+    </p:extLst>
   </p:cSld>
   <p:clrMapOvr>
     <a:masterClrMapping/>
@@ -1510,8 +1955,8 @@
         </p:nvSpPr>
         <p:spPr>
           <a:xfrm>
-            <a:off x="381000" y="685800"/>
-            <a:ext cx="6096000" cy="3429000"/>
+            <a:off x="87313" y="744538"/>
+            <a:ext cx="6619875" cy="3724275"/>
           </a:xfrm>
           <a:custGeom>
             <a:avLst/>
@@ -1551,8 +1996,8 @@
         </p:nvSpPr>
         <p:spPr>
           <a:xfrm>
-            <a:off x="685800" y="4343400"/>
-            <a:ext cx="5486400" cy="4114800"/>
+            <a:off x="679450" y="4717415"/>
+            <a:ext cx="5435600" cy="4469130"/>
           </a:xfrm>
           <a:prstGeom prst="rect">
             <a:avLst/>
@@ -1614,8 +2059,8 @@
         </p:nvSpPr>
         <p:spPr>
           <a:xfrm>
-            <a:off x="381000" y="685800"/>
-            <a:ext cx="6096000" cy="3429000"/>
+            <a:off x="87313" y="744538"/>
+            <a:ext cx="6619875" cy="3724275"/>
           </a:xfrm>
           <a:custGeom>
             <a:avLst/>
@@ -1655,8 +2100,8 @@
         </p:nvSpPr>
         <p:spPr>
           <a:xfrm>
-            <a:off x="685800" y="4343400"/>
-            <a:ext cx="5486400" cy="4114800"/>
+            <a:off x="679450" y="4717415"/>
+            <a:ext cx="5435600" cy="4469130"/>
           </a:xfrm>
           <a:prstGeom prst="rect">
             <a:avLst/>
@@ -1718,8 +2163,8 @@
         </p:nvSpPr>
         <p:spPr>
           <a:xfrm>
-            <a:off x="381000" y="685800"/>
-            <a:ext cx="6096000" cy="3429000"/>
+            <a:off x="87313" y="744538"/>
+            <a:ext cx="6619875" cy="3724275"/>
           </a:xfrm>
           <a:custGeom>
             <a:avLst/>
@@ -1759,8 +2204,8 @@
         </p:nvSpPr>
         <p:spPr>
           <a:xfrm>
-            <a:off x="685800" y="4343400"/>
-            <a:ext cx="5486400" cy="4114800"/>
+            <a:off x="679450" y="4717415"/>
+            <a:ext cx="5435600" cy="4469130"/>
           </a:xfrm>
           <a:prstGeom prst="rect">
             <a:avLst/>
@@ -1822,8 +2267,8 @@
         </p:nvSpPr>
         <p:spPr>
           <a:xfrm>
-            <a:off x="381000" y="685800"/>
-            <a:ext cx="6096000" cy="3429000"/>
+            <a:off x="87313" y="744538"/>
+            <a:ext cx="6619875" cy="3724275"/>
           </a:xfrm>
           <a:custGeom>
             <a:avLst/>
@@ -1863,8 +2308,8 @@
         </p:nvSpPr>
         <p:spPr>
           <a:xfrm>
-            <a:off x="685800" y="4343400"/>
-            <a:ext cx="5486400" cy="4114800"/>
+            <a:off x="679450" y="4717415"/>
+            <a:ext cx="5435600" cy="4469130"/>
           </a:xfrm>
           <a:prstGeom prst="rect">
             <a:avLst/>
@@ -1926,8 +2371,8 @@
         </p:nvSpPr>
         <p:spPr>
           <a:xfrm>
-            <a:off x="381000" y="685800"/>
-            <a:ext cx="6096000" cy="3429000"/>
+            <a:off x="87313" y="744538"/>
+            <a:ext cx="6619875" cy="3724275"/>
           </a:xfrm>
           <a:custGeom>
             <a:avLst/>
@@ -1967,8 +2412,8 @@
         </p:nvSpPr>
         <p:spPr>
           <a:xfrm>
-            <a:off x="685800" y="4343400"/>
-            <a:ext cx="5486400" cy="4114800"/>
+            <a:off x="679450" y="4717415"/>
+            <a:ext cx="5435600" cy="4469130"/>
           </a:xfrm>
           <a:prstGeom prst="rect">
             <a:avLst/>
@@ -2030,8 +2475,8 @@
         </p:nvSpPr>
         <p:spPr>
           <a:xfrm>
-            <a:off x="381000" y="685800"/>
-            <a:ext cx="6096000" cy="3429000"/>
+            <a:off x="87313" y="744538"/>
+            <a:ext cx="6619875" cy="3724275"/>
           </a:xfrm>
           <a:custGeom>
             <a:avLst/>
@@ -2071,8 +2516,8 @@
         </p:nvSpPr>
         <p:spPr>
           <a:xfrm>
-            <a:off x="685800" y="4343400"/>
-            <a:ext cx="5486400" cy="4114800"/>
+            <a:off x="679450" y="4717415"/>
+            <a:ext cx="5435600" cy="4469130"/>
           </a:xfrm>
           <a:prstGeom prst="rect">
             <a:avLst/>
@@ -2134,8 +2579,8 @@
         </p:nvSpPr>
         <p:spPr>
           <a:xfrm>
-            <a:off x="381000" y="685800"/>
-            <a:ext cx="6096000" cy="3429000"/>
+            <a:off x="87313" y="744538"/>
+            <a:ext cx="6619875" cy="3724275"/>
           </a:xfrm>
           <a:custGeom>
             <a:avLst/>
@@ -2175,8 +2620,8 @@
         </p:nvSpPr>
         <p:spPr>
           <a:xfrm>
-            <a:off x="685800" y="4343400"/>
-            <a:ext cx="5486400" cy="4114800"/>
+            <a:off x="679450" y="4717415"/>
+            <a:ext cx="5435600" cy="4469130"/>
           </a:xfrm>
           <a:prstGeom prst="rect">
             <a:avLst/>
@@ -2238,8 +2683,8 @@
         </p:nvSpPr>
         <p:spPr>
           <a:xfrm>
-            <a:off x="381000" y="685800"/>
-            <a:ext cx="6096000" cy="3429000"/>
+            <a:off x="87313" y="744538"/>
+            <a:ext cx="6619875" cy="3724275"/>
           </a:xfrm>
           <a:custGeom>
             <a:avLst/>
@@ -2279,8 +2724,8 @@
         </p:nvSpPr>
         <p:spPr>
           <a:xfrm>
-            <a:off x="685800" y="4343400"/>
-            <a:ext cx="5486400" cy="4114800"/>
+            <a:off x="679450" y="4717415"/>
+            <a:ext cx="5435600" cy="4469130"/>
           </a:xfrm>
           <a:prstGeom prst="rect">
             <a:avLst/>
@@ -10420,8 +10865,8 @@
         </p:nvSpPr>
         <p:spPr>
           <a:xfrm>
-            <a:off x="642050" y="2134800"/>
-            <a:ext cx="5308200" cy="1476000"/>
+            <a:off x="642050" y="2134799"/>
+            <a:ext cx="5308200" cy="2132401"/>
           </a:xfrm>
           <a:prstGeom prst="rect">
             <a:avLst/>
@@ -10443,10 +10888,10 @@
               <a:buNone/>
             </a:pPr>
             <a:r>
-              <a:rPr lang="en"/>
+              <a:rPr lang="en" dirty="0"/>
               <a:t>First to count the amount of null values:</a:t>
             </a:r>
-            <a:endParaRPr/>
+            <a:endParaRPr dirty="0"/>
           </a:p>
           <a:p>
             <a:pPr marL="0" lvl="0" indent="0" algn="l" rtl="0">
@@ -10459,10 +10904,10 @@
               <a:buNone/>
             </a:pPr>
             <a:r>
-              <a:rPr lang="en"/>
+              <a:rPr lang="en" dirty="0"/>
               <a:t>df.isnull() - returns a dataframe with true and false values</a:t>
             </a:r>
-            <a:endParaRPr/>
+            <a:endParaRPr dirty="0"/>
           </a:p>
           <a:p>
             <a:pPr marL="0" lvl="0" indent="0" algn="l" rtl="0">
@@ -10475,10 +10920,35 @@
               <a:buNone/>
             </a:pPr>
             <a:r>
-              <a:rPr lang="en"/>
-              <a:t>To get the count per column, do df.is_null().count()</a:t>
-            </a:r>
-            <a:endParaRPr/>
+              <a:rPr lang="en" dirty="0"/>
+              <a:t>To get the count per column, do df.</a:t>
+            </a:r>
+            <a:r>
+              <a:rPr lang="en" b="1" dirty="0"/>
+              <a:t>isnull</a:t>
+            </a:r>
+            <a:r>
+              <a:rPr lang="en" dirty="0"/>
+              <a:t>().count() </a:t>
+            </a:r>
+            <a:r>
+              <a:rPr lang="en" dirty="0">
+                <a:sym typeface="Wingdings" panose="05000000000000000000" pitchFamily="2" charset="2"/>
+              </a:rPr>
+              <a:t> tells us about the count for all elements including NaN (missing values)</a:t>
+            </a:r>
+          </a:p>
+          <a:p>
+            <a:pPr marL="0" lvl="0" indent="0" algn="l" rtl="0">
+              <a:spcBef>
+                <a:spcPts val="1600"/>
+              </a:spcBef>
+              <a:spcAft>
+                <a:spcPts val="1600"/>
+              </a:spcAft>
+              <a:buNone/>
+            </a:pPr>
+            <a:endParaRPr dirty="0"/>
           </a:p>
         </p:txBody>
       </p:sp>
@@ -10533,6 +11003,2489 @@
 </file>
 
 <file path=ppt/slides/slide16.xml><?xml version="1.0" encoding="utf-8"?>
+<p:sld xmlns:a="http://schemas.openxmlformats.org/drawingml/2006/main" xmlns:r="http://schemas.openxmlformats.org/officeDocument/2006/relationships" xmlns:p="http://schemas.openxmlformats.org/presentationml/2006/main">
+  <p:cSld>
+    <p:bg>
+      <p:bgPr>
+        <a:blipFill>
+          <a:blip r:embed="rId4">
+            <a:alphaModFix/>
+          </a:blip>
+          <a:stretch>
+            <a:fillRect/>
+          </a:stretch>
+        </a:blipFill>
+        <a:effectLst/>
+      </p:bgPr>
+    </p:bg>
+    <p:spTree>
+      <p:nvGrpSpPr>
+        <p:cNvPr id="1" name="Shape 231">
+          <a:extLst>
+            <a:ext uri="{FF2B5EF4-FFF2-40B4-BE49-F238E27FC236}">
+              <a16:creationId xmlns:a16="http://schemas.microsoft.com/office/drawing/2014/main" id="{8FADA92A-D64E-B450-C678-DDBE0A3EBE6C}"/>
+            </a:ext>
+          </a:extLst>
+        </p:cNvPr>
+        <p:cNvGrpSpPr/>
+        <p:nvPr/>
+      </p:nvGrpSpPr>
+      <p:grpSpPr>
+        <a:xfrm>
+          <a:off x="0" y="0"/>
+          <a:ext cx="0" cy="0"/>
+          <a:chOff x="0" y="0"/>
+          <a:chExt cx="0" cy="0"/>
+        </a:xfrm>
+      </p:grpSpPr>
+      <p:sp>
+        <p:nvSpPr>
+          <p:cNvPr id="232" name="Google Shape;232;p43">
+            <a:extLst>
+              <a:ext uri="{FF2B5EF4-FFF2-40B4-BE49-F238E27FC236}">
+                <a16:creationId xmlns:a16="http://schemas.microsoft.com/office/drawing/2014/main" id="{CD09A807-07A3-3645-AB33-E6EE4D300202}"/>
+              </a:ext>
+            </a:extLst>
+          </p:cNvPr>
+          <p:cNvSpPr txBox="1">
+            <a:spLocks noGrp="1"/>
+          </p:cNvSpPr>
+          <p:nvPr>
+            <p:ph type="body" idx="1"/>
+          </p:nvPr>
+        </p:nvSpPr>
+        <p:spPr>
+          <a:xfrm>
+            <a:off x="642050" y="2134799"/>
+            <a:ext cx="5308200" cy="2132401"/>
+          </a:xfrm>
+          <a:prstGeom prst="rect">
+            <a:avLst/>
+          </a:prstGeom>
+        </p:spPr>
+        <p:txBody>
+          <a:bodyPr spcFirstLastPara="1" wrap="square" lIns="91425" tIns="91425" rIns="91425" bIns="91425" anchor="t" anchorCtr="0">
+            <a:noAutofit/>
+          </a:bodyPr>
+          <a:lstStyle/>
+          <a:p>
+            <a:pPr marL="0" lvl="0" indent="0">
+              <a:buNone/>
+            </a:pPr>
+            <a:r>
+              <a:rPr lang="de-DE" b="1" dirty="0"/>
+              <a:t>Clear Explanation</a:t>
+            </a:r>
+            <a:r>
+              <a:rPr lang="en" dirty="0"/>
+              <a:t>:</a:t>
+            </a:r>
+            <a:endParaRPr dirty="0"/>
+          </a:p>
+          <a:p>
+            <a:pPr marL="171450" indent="-171450">
+              <a:spcBef>
+                <a:spcPts val="1600"/>
+              </a:spcBef>
+            </a:pPr>
+            <a:r>
+              <a:rPr lang="en-US" dirty="0" err="1"/>
+              <a:t>df.isnull</a:t>
+            </a:r>
+            <a:r>
+              <a:rPr lang="en-US" dirty="0"/>
+              <a:t>().sum(): gives the number of missing values (</a:t>
+            </a:r>
+            <a:r>
+              <a:rPr lang="en-US" dirty="0" err="1"/>
+              <a:t>NaN</a:t>
+            </a:r>
+            <a:r>
+              <a:rPr lang="en-US" dirty="0"/>
+              <a:t>) in each column.</a:t>
+            </a:r>
+          </a:p>
+          <a:p>
+            <a:pPr marL="171450" lvl="0" indent="-171450">
+              <a:spcBef>
+                <a:spcPts val="1600"/>
+              </a:spcBef>
+            </a:pPr>
+            <a:r>
+              <a:rPr lang="en-US" dirty="0" err="1"/>
+              <a:t>df.count</a:t>
+            </a:r>
+            <a:r>
+              <a:rPr lang="en-US" dirty="0"/>
+              <a:t>(): gives the number of non-missing values in each column.</a:t>
+            </a:r>
+          </a:p>
+          <a:p>
+            <a:pPr marL="171450" indent="-171450">
+              <a:spcBef>
+                <a:spcPts val="1600"/>
+              </a:spcBef>
+            </a:pPr>
+            <a:r>
+              <a:rPr lang="en-US" dirty="0" err="1"/>
+              <a:t>df.shape</a:t>
+            </a:r>
+            <a:r>
+              <a:rPr lang="en-US" dirty="0"/>
+              <a:t>[0]: gives the total number of rows in the </a:t>
+            </a:r>
+            <a:r>
+              <a:rPr lang="en-US" dirty="0" err="1"/>
+              <a:t>DataFrame</a:t>
+            </a:r>
+            <a:r>
+              <a:rPr lang="en-US" dirty="0"/>
+              <a:t>.</a:t>
+            </a:r>
+          </a:p>
+          <a:p>
+            <a:pPr marL="0" lvl="0" indent="0" algn="l" rtl="0">
+              <a:spcBef>
+                <a:spcPts val="1600"/>
+              </a:spcBef>
+              <a:spcAft>
+                <a:spcPts val="1600"/>
+              </a:spcAft>
+              <a:buNone/>
+            </a:pPr>
+            <a:endParaRPr dirty="0"/>
+          </a:p>
+        </p:txBody>
+      </p:sp>
+      <p:sp>
+        <p:nvSpPr>
+          <p:cNvPr id="233" name="Google Shape;233;p43">
+            <a:extLst>
+              <a:ext uri="{FF2B5EF4-FFF2-40B4-BE49-F238E27FC236}">
+                <a16:creationId xmlns:a16="http://schemas.microsoft.com/office/drawing/2014/main" id="{6046F6B5-09C8-6497-A774-C523DB31F183}"/>
+              </a:ext>
+            </a:extLst>
+          </p:cNvPr>
+          <p:cNvSpPr txBox="1">
+            <a:spLocks noGrp="1"/>
+          </p:cNvSpPr>
+          <p:nvPr>
+            <p:ph type="ctrTitle"/>
+          </p:nvPr>
+        </p:nvSpPr>
+        <p:spPr>
+          <a:prstGeom prst="rect">
+            <a:avLst/>
+          </a:prstGeom>
+        </p:spPr>
+        <p:txBody>
+          <a:bodyPr spcFirstLastPara="1" wrap="square" lIns="91425" tIns="91425" rIns="91425" bIns="91425" anchor="t" anchorCtr="0">
+            <a:noAutofit/>
+          </a:bodyPr>
+          <a:lstStyle/>
+          <a:p>
+            <a:pPr lvl="0"/>
+            <a:r>
+              <a:rPr lang="en" dirty="0"/>
+              <a:t>All about Null values,</a:t>
+            </a:r>
+            <a:br>
+              <a:rPr lang="en" dirty="0"/>
+            </a:br>
+            <a:r>
+              <a:rPr lang="de-DE" dirty="0"/>
+              <a:t>Clear Explanation:</a:t>
+            </a:r>
+            <a:br>
+              <a:rPr lang="en" dirty="0"/>
+            </a:br>
+            <a:endParaRPr dirty="0"/>
+          </a:p>
+        </p:txBody>
+      </p:sp>
+      <p:sp>
+        <p:nvSpPr>
+          <p:cNvPr id="2" name="Rectangle 1">
+            <a:extLst>
+              <a:ext uri="{FF2B5EF4-FFF2-40B4-BE49-F238E27FC236}">
+                <a16:creationId xmlns:a16="http://schemas.microsoft.com/office/drawing/2014/main" id="{2B3B3D73-1B0C-25E7-0423-E9926AD56E2D}"/>
+              </a:ext>
+            </a:extLst>
+          </p:cNvPr>
+          <p:cNvSpPr>
+            <a:spLocks noChangeArrowheads="1"/>
+          </p:cNvSpPr>
+          <p:nvPr/>
+        </p:nvSpPr>
+        <p:spPr bwMode="auto">
+          <a:xfrm>
+            <a:off x="0" y="0"/>
+            <a:ext cx="9144000" cy="0"/>
+          </a:xfrm>
+          <a:prstGeom prst="rect">
+            <a:avLst/>
+          </a:prstGeom>
+          <a:noFill/>
+          <a:ln>
+            <a:noFill/>
+          </a:ln>
+          <a:effectLst/>
+          <a:extLst>
+            <a:ext uri="{909E8E84-426E-40DD-AFC4-6F175D3DCCD1}">
+              <a14:hiddenFill xmlns:a14="http://schemas.microsoft.com/office/drawing/2010/main">
+                <a:solidFill>
+                  <a:schemeClr val="accent1"/>
+                </a:solidFill>
+              </a14:hiddenFill>
+            </a:ext>
+            <a:ext uri="{91240B29-F687-4F45-9708-019B960494DF}">
+              <a14:hiddenLine xmlns:a14="http://schemas.microsoft.com/office/drawing/2010/main" w="9525">
+                <a:solidFill>
+                  <a:schemeClr val="tx1"/>
+                </a:solidFill>
+                <a:miter lim="800000"/>
+                <a:headEnd/>
+                <a:tailEnd/>
+              </a14:hiddenLine>
+            </a:ext>
+            <a:ext uri="{AF507438-7753-43E0-B8FC-AC1667EBCBE1}">
+              <a14:hiddenEffects xmlns:a14="http://schemas.microsoft.com/office/drawing/2010/main">
+                <a:effectLst>
+                  <a:outerShdw dist="35921" dir="2700000" algn="ctr" rotWithShape="0">
+                    <a:schemeClr val="bg2"/>
+                  </a:outerShdw>
+                </a:effectLst>
+              </a14:hiddenEffects>
+            </a:ext>
+          </a:extLst>
+        </p:spPr>
+        <p:txBody>
+          <a:bodyPr vert="horz" wrap="none" lIns="91440" tIns="45720" rIns="91440" bIns="45720" numCol="1" anchor="ctr" anchorCtr="0" compatLnSpc="1">
+            <a:prstTxWarp prst="textNoShape">
+              <a:avLst/>
+            </a:prstTxWarp>
+            <a:spAutoFit/>
+          </a:bodyPr>
+          <a:lstStyle/>
+          <a:p>
+            <a:pPr marL="0" marR="0" lvl="0" indent="0" algn="l" defTabSz="914400" rtl="0" eaLnBrk="0" fontAlgn="base" latinLnBrk="0" hangingPunct="0">
+              <a:lnSpc>
+                <a:spcPct val="100000"/>
+              </a:lnSpc>
+              <a:spcBef>
+                <a:spcPct val="0"/>
+              </a:spcBef>
+              <a:spcAft>
+                <a:spcPct val="0"/>
+              </a:spcAft>
+              <a:buClrTx/>
+              <a:buSzTx/>
+              <a:buFontTx/>
+              <a:buChar char="•"/>
+              <a:tabLst/>
+            </a:pPr>
+            <a:r>
+              <a:rPr kumimoji="0" lang="de-DE" altLang="de-DE" sz="1000" b="0" i="0" u="none" strike="noStrike" cap="none" normalizeH="0" baseline="0">
+                <a:ln>
+                  <a:noFill/>
+                </a:ln>
+                <a:solidFill>
+                  <a:schemeClr val="tx1"/>
+                </a:solidFill>
+                <a:effectLst/>
+                <a:latin typeface="Arial Unicode MS"/>
+              </a:rPr>
+              <a:t>df.isnull().sum()</a:t>
+            </a:r>
+            <a:br>
+              <a:rPr kumimoji="0" lang="de-DE" altLang="de-DE" sz="200" b="0" i="0" u="none" strike="noStrike" cap="none" normalizeH="0" baseline="0">
+                <a:ln>
+                  <a:noFill/>
+                </a:ln>
+                <a:solidFill>
+                  <a:schemeClr val="tx1"/>
+                </a:solidFill>
+                <a:effectLst/>
+              </a:rPr>
+            </a:br>
+            <a:r>
+              <a:rPr kumimoji="0" lang="de-DE" altLang="de-DE" sz="200" b="0" i="0" u="none" strike="noStrike" cap="none" normalizeH="0" baseline="0">
+                <a:ln>
+                  <a:noFill/>
+                </a:ln>
+                <a:solidFill>
+                  <a:schemeClr val="tx1"/>
+                </a:solidFill>
+                <a:effectLst/>
+              </a:rPr>
+              <a:t>gives the number of missing values (NaN) in each column.</a:t>
+            </a:r>
+            <a:endParaRPr kumimoji="0" lang="de-DE" altLang="de-DE" sz="1800" b="0" i="0" u="none" strike="noStrike" cap="none" normalizeH="0" baseline="0">
+              <a:ln>
+                <a:noFill/>
+              </a:ln>
+              <a:solidFill>
+                <a:schemeClr val="tx1"/>
+              </a:solidFill>
+              <a:effectLst/>
+              <a:latin typeface="Arial" panose="020B0604020202020204" pitchFamily="34" charset="0"/>
+            </a:endParaRPr>
+          </a:p>
+          <a:p>
+            <a:pPr marL="0" marR="0" lvl="0" indent="0" algn="l" defTabSz="914400" rtl="0" eaLnBrk="0" fontAlgn="base" latinLnBrk="0" hangingPunct="0">
+              <a:lnSpc>
+                <a:spcPct val="100000"/>
+              </a:lnSpc>
+              <a:spcBef>
+                <a:spcPct val="0"/>
+              </a:spcBef>
+              <a:spcAft>
+                <a:spcPct val="0"/>
+              </a:spcAft>
+              <a:buClrTx/>
+              <a:buSzTx/>
+              <a:buFontTx/>
+              <a:buChar char="•"/>
+              <a:tabLst/>
+            </a:pPr>
+            <a:r>
+              <a:rPr kumimoji="0" lang="de-DE" altLang="de-DE" sz="1000" b="0" i="0" u="none" strike="noStrike" cap="none" normalizeH="0" baseline="0">
+                <a:ln>
+                  <a:noFill/>
+                </a:ln>
+                <a:solidFill>
+                  <a:schemeClr val="tx1"/>
+                </a:solidFill>
+                <a:effectLst/>
+                <a:latin typeface="Arial Unicode MS"/>
+              </a:rPr>
+              <a:t>df.count()</a:t>
+            </a:r>
+            <a:br>
+              <a:rPr kumimoji="0" lang="de-DE" altLang="de-DE" sz="200" b="0" i="0" u="none" strike="noStrike" cap="none" normalizeH="0" baseline="0">
+                <a:ln>
+                  <a:noFill/>
+                </a:ln>
+                <a:solidFill>
+                  <a:schemeClr val="tx1"/>
+                </a:solidFill>
+                <a:effectLst/>
+              </a:rPr>
+            </a:br>
+            <a:r>
+              <a:rPr kumimoji="0" lang="de-DE" altLang="de-DE" sz="200" b="0" i="0" u="none" strike="noStrike" cap="none" normalizeH="0" baseline="0">
+                <a:ln>
+                  <a:noFill/>
+                </a:ln>
+                <a:solidFill>
+                  <a:schemeClr val="tx1"/>
+                </a:solidFill>
+                <a:effectLst/>
+              </a:rPr>
+              <a:t>gives the number of non-missing values in each column.</a:t>
+            </a:r>
+            <a:endParaRPr kumimoji="0" lang="de-DE" altLang="de-DE" sz="1800" b="0" i="0" u="none" strike="noStrike" cap="none" normalizeH="0" baseline="0">
+              <a:ln>
+                <a:noFill/>
+              </a:ln>
+              <a:solidFill>
+                <a:schemeClr val="tx1"/>
+              </a:solidFill>
+              <a:effectLst/>
+              <a:latin typeface="Arial" panose="020B0604020202020204" pitchFamily="34" charset="0"/>
+            </a:endParaRPr>
+          </a:p>
+          <a:p>
+            <a:pPr marL="0" marR="0" lvl="0" indent="0" algn="l" defTabSz="914400" rtl="0" eaLnBrk="0" fontAlgn="base" latinLnBrk="0" hangingPunct="0">
+              <a:lnSpc>
+                <a:spcPct val="100000"/>
+              </a:lnSpc>
+              <a:spcBef>
+                <a:spcPct val="0"/>
+              </a:spcBef>
+              <a:spcAft>
+                <a:spcPct val="0"/>
+              </a:spcAft>
+              <a:buClrTx/>
+              <a:buSzTx/>
+              <a:buFontTx/>
+              <a:buChar char="•"/>
+              <a:tabLst/>
+            </a:pPr>
+            <a:r>
+              <a:rPr kumimoji="0" lang="de-DE" altLang="de-DE" sz="1000" b="0" i="0" u="none" strike="noStrike" cap="none" normalizeH="0" baseline="0">
+                <a:ln>
+                  <a:noFill/>
+                </a:ln>
+                <a:solidFill>
+                  <a:schemeClr val="tx1"/>
+                </a:solidFill>
+                <a:effectLst/>
+                <a:latin typeface="Arial Unicode MS"/>
+              </a:rPr>
+              <a:t>df.shape[0]</a:t>
+            </a:r>
+            <a:br>
+              <a:rPr kumimoji="0" lang="de-DE" altLang="de-DE" sz="200" b="0" i="0" u="none" strike="noStrike" cap="none" normalizeH="0" baseline="0">
+                <a:ln>
+                  <a:noFill/>
+                </a:ln>
+                <a:solidFill>
+                  <a:schemeClr val="tx1"/>
+                </a:solidFill>
+                <a:effectLst/>
+              </a:rPr>
+            </a:br>
+            <a:r>
+              <a:rPr kumimoji="0" lang="de-DE" altLang="de-DE" sz="200" b="0" i="0" u="none" strike="noStrike" cap="none" normalizeH="0" baseline="0">
+                <a:ln>
+                  <a:noFill/>
+                </a:ln>
+                <a:solidFill>
+                  <a:schemeClr val="tx1"/>
+                </a:solidFill>
+                <a:effectLst/>
+              </a:rPr>
+              <a:t>gives the total number of rows in the DataFrame.</a:t>
+            </a:r>
+            <a:endParaRPr kumimoji="0" lang="de-DE" altLang="de-DE" sz="1800" b="0" i="0" u="none" strike="noStrike" cap="none" normalizeH="0" baseline="0">
+              <a:ln>
+                <a:noFill/>
+              </a:ln>
+              <a:solidFill>
+                <a:schemeClr val="tx1"/>
+              </a:solidFill>
+              <a:effectLst/>
+              <a:latin typeface="Arial" panose="020B0604020202020204" pitchFamily="34" charset="0"/>
+            </a:endParaRPr>
+          </a:p>
+        </p:txBody>
+      </p:sp>
+      <p:sp>
+        <p:nvSpPr>
+          <p:cNvPr id="3" name="Rectangle 2">
+            <a:extLst>
+              <a:ext uri="{FF2B5EF4-FFF2-40B4-BE49-F238E27FC236}">
+                <a16:creationId xmlns:a16="http://schemas.microsoft.com/office/drawing/2014/main" id="{F50C749F-0D0B-DD02-A612-F561B44FD847}"/>
+              </a:ext>
+            </a:extLst>
+          </p:cNvPr>
+          <p:cNvSpPr>
+            <a:spLocks noChangeArrowheads="1"/>
+          </p:cNvSpPr>
+          <p:nvPr/>
+        </p:nvSpPr>
+        <p:spPr bwMode="auto">
+          <a:xfrm>
+            <a:off x="152400" y="152400"/>
+            <a:ext cx="9144000" cy="0"/>
+          </a:xfrm>
+          <a:prstGeom prst="rect">
+            <a:avLst/>
+          </a:prstGeom>
+          <a:noFill/>
+          <a:ln>
+            <a:noFill/>
+          </a:ln>
+          <a:effectLst/>
+          <a:extLst>
+            <a:ext uri="{909E8E84-426E-40DD-AFC4-6F175D3DCCD1}">
+              <a14:hiddenFill xmlns:a14="http://schemas.microsoft.com/office/drawing/2010/main">
+                <a:solidFill>
+                  <a:schemeClr val="accent1"/>
+                </a:solidFill>
+              </a14:hiddenFill>
+            </a:ext>
+            <a:ext uri="{91240B29-F687-4F45-9708-019B960494DF}">
+              <a14:hiddenLine xmlns:a14="http://schemas.microsoft.com/office/drawing/2010/main" w="9525">
+                <a:solidFill>
+                  <a:schemeClr val="tx1"/>
+                </a:solidFill>
+                <a:miter lim="800000"/>
+                <a:headEnd/>
+                <a:tailEnd/>
+              </a14:hiddenLine>
+            </a:ext>
+            <a:ext uri="{AF507438-7753-43E0-B8FC-AC1667EBCBE1}">
+              <a14:hiddenEffects xmlns:a14="http://schemas.microsoft.com/office/drawing/2010/main">
+                <a:effectLst>
+                  <a:outerShdw dist="35921" dir="2700000" algn="ctr" rotWithShape="0">
+                    <a:schemeClr val="bg2"/>
+                  </a:outerShdw>
+                </a:effectLst>
+              </a14:hiddenEffects>
+            </a:ext>
+          </a:extLst>
+        </p:spPr>
+        <p:txBody>
+          <a:bodyPr vert="horz" wrap="none" lIns="91440" tIns="45720" rIns="91440" bIns="45720" numCol="1" anchor="ctr" anchorCtr="0" compatLnSpc="1">
+            <a:prstTxWarp prst="textNoShape">
+              <a:avLst/>
+            </a:prstTxWarp>
+            <a:spAutoFit/>
+          </a:bodyPr>
+          <a:lstStyle/>
+          <a:p>
+            <a:pPr marL="0" marR="0" lvl="0" indent="0" algn="l" defTabSz="914400" rtl="0" eaLnBrk="0" fontAlgn="base" latinLnBrk="0" hangingPunct="0">
+              <a:lnSpc>
+                <a:spcPct val="100000"/>
+              </a:lnSpc>
+              <a:spcBef>
+                <a:spcPct val="0"/>
+              </a:spcBef>
+              <a:spcAft>
+                <a:spcPct val="0"/>
+              </a:spcAft>
+              <a:buClrTx/>
+              <a:buSzTx/>
+              <a:buFontTx/>
+              <a:buChar char="•"/>
+              <a:tabLst/>
+            </a:pPr>
+            <a:r>
+              <a:rPr kumimoji="0" lang="de-DE" altLang="de-DE" sz="1000" b="0" i="0" u="none" strike="noStrike" cap="none" normalizeH="0" baseline="0">
+                <a:ln>
+                  <a:noFill/>
+                </a:ln>
+                <a:solidFill>
+                  <a:schemeClr val="tx1"/>
+                </a:solidFill>
+                <a:effectLst/>
+                <a:latin typeface="Arial Unicode MS"/>
+              </a:rPr>
+              <a:t>df.isnull().sum()</a:t>
+            </a:r>
+            <a:br>
+              <a:rPr kumimoji="0" lang="de-DE" altLang="de-DE" sz="200" b="0" i="0" u="none" strike="noStrike" cap="none" normalizeH="0" baseline="0">
+                <a:ln>
+                  <a:noFill/>
+                </a:ln>
+                <a:solidFill>
+                  <a:schemeClr val="tx1"/>
+                </a:solidFill>
+                <a:effectLst/>
+              </a:rPr>
+            </a:br>
+            <a:r>
+              <a:rPr kumimoji="0" lang="de-DE" altLang="de-DE" sz="200" b="0" i="0" u="none" strike="noStrike" cap="none" normalizeH="0" baseline="0">
+                <a:ln>
+                  <a:noFill/>
+                </a:ln>
+                <a:solidFill>
+                  <a:schemeClr val="tx1"/>
+                </a:solidFill>
+                <a:effectLst/>
+              </a:rPr>
+              <a:t>gives the number of missing values (NaN) in each column.</a:t>
+            </a:r>
+            <a:endParaRPr kumimoji="0" lang="de-DE" altLang="de-DE" sz="1800" b="0" i="0" u="none" strike="noStrike" cap="none" normalizeH="0" baseline="0">
+              <a:ln>
+                <a:noFill/>
+              </a:ln>
+              <a:solidFill>
+                <a:schemeClr val="tx1"/>
+              </a:solidFill>
+              <a:effectLst/>
+              <a:latin typeface="Arial" panose="020B0604020202020204" pitchFamily="34" charset="0"/>
+            </a:endParaRPr>
+          </a:p>
+          <a:p>
+            <a:pPr marL="0" marR="0" lvl="0" indent="0" algn="l" defTabSz="914400" rtl="0" eaLnBrk="0" fontAlgn="base" latinLnBrk="0" hangingPunct="0">
+              <a:lnSpc>
+                <a:spcPct val="100000"/>
+              </a:lnSpc>
+              <a:spcBef>
+                <a:spcPct val="0"/>
+              </a:spcBef>
+              <a:spcAft>
+                <a:spcPct val="0"/>
+              </a:spcAft>
+              <a:buClrTx/>
+              <a:buSzTx/>
+              <a:buFontTx/>
+              <a:buChar char="•"/>
+              <a:tabLst/>
+            </a:pPr>
+            <a:r>
+              <a:rPr kumimoji="0" lang="de-DE" altLang="de-DE" sz="1000" b="0" i="0" u="none" strike="noStrike" cap="none" normalizeH="0" baseline="0">
+                <a:ln>
+                  <a:noFill/>
+                </a:ln>
+                <a:solidFill>
+                  <a:schemeClr val="tx1"/>
+                </a:solidFill>
+                <a:effectLst/>
+                <a:latin typeface="Arial Unicode MS"/>
+              </a:rPr>
+              <a:t>df.count()</a:t>
+            </a:r>
+            <a:br>
+              <a:rPr kumimoji="0" lang="de-DE" altLang="de-DE" sz="200" b="0" i="0" u="none" strike="noStrike" cap="none" normalizeH="0" baseline="0">
+                <a:ln>
+                  <a:noFill/>
+                </a:ln>
+                <a:solidFill>
+                  <a:schemeClr val="tx1"/>
+                </a:solidFill>
+                <a:effectLst/>
+              </a:rPr>
+            </a:br>
+            <a:r>
+              <a:rPr kumimoji="0" lang="de-DE" altLang="de-DE" sz="200" b="0" i="0" u="none" strike="noStrike" cap="none" normalizeH="0" baseline="0">
+                <a:ln>
+                  <a:noFill/>
+                </a:ln>
+                <a:solidFill>
+                  <a:schemeClr val="tx1"/>
+                </a:solidFill>
+                <a:effectLst/>
+              </a:rPr>
+              <a:t>gives the number of non-missing values in each column.</a:t>
+            </a:r>
+            <a:endParaRPr kumimoji="0" lang="de-DE" altLang="de-DE" sz="1800" b="0" i="0" u="none" strike="noStrike" cap="none" normalizeH="0" baseline="0">
+              <a:ln>
+                <a:noFill/>
+              </a:ln>
+              <a:solidFill>
+                <a:schemeClr val="tx1"/>
+              </a:solidFill>
+              <a:effectLst/>
+              <a:latin typeface="Arial" panose="020B0604020202020204" pitchFamily="34" charset="0"/>
+            </a:endParaRPr>
+          </a:p>
+          <a:p>
+            <a:pPr marL="0" marR="0" lvl="0" indent="0" algn="l" defTabSz="914400" rtl="0" eaLnBrk="0" fontAlgn="base" latinLnBrk="0" hangingPunct="0">
+              <a:lnSpc>
+                <a:spcPct val="100000"/>
+              </a:lnSpc>
+              <a:spcBef>
+                <a:spcPct val="0"/>
+              </a:spcBef>
+              <a:spcAft>
+                <a:spcPct val="0"/>
+              </a:spcAft>
+              <a:buClrTx/>
+              <a:buSzTx/>
+              <a:buFontTx/>
+              <a:buChar char="•"/>
+              <a:tabLst/>
+            </a:pPr>
+            <a:r>
+              <a:rPr kumimoji="0" lang="de-DE" altLang="de-DE" sz="1000" b="0" i="0" u="none" strike="noStrike" cap="none" normalizeH="0" baseline="0">
+                <a:ln>
+                  <a:noFill/>
+                </a:ln>
+                <a:solidFill>
+                  <a:schemeClr val="tx1"/>
+                </a:solidFill>
+                <a:effectLst/>
+                <a:latin typeface="Arial Unicode MS"/>
+              </a:rPr>
+              <a:t>df.shape[0]</a:t>
+            </a:r>
+            <a:br>
+              <a:rPr kumimoji="0" lang="de-DE" altLang="de-DE" sz="200" b="0" i="0" u="none" strike="noStrike" cap="none" normalizeH="0" baseline="0">
+                <a:ln>
+                  <a:noFill/>
+                </a:ln>
+                <a:solidFill>
+                  <a:schemeClr val="tx1"/>
+                </a:solidFill>
+                <a:effectLst/>
+              </a:rPr>
+            </a:br>
+            <a:r>
+              <a:rPr kumimoji="0" lang="de-DE" altLang="de-DE" sz="200" b="0" i="0" u="none" strike="noStrike" cap="none" normalizeH="0" baseline="0">
+                <a:ln>
+                  <a:noFill/>
+                </a:ln>
+                <a:solidFill>
+                  <a:schemeClr val="tx1"/>
+                </a:solidFill>
+                <a:effectLst/>
+              </a:rPr>
+              <a:t>gives the total number of rows in the DataFrame.</a:t>
+            </a:r>
+            <a:endParaRPr kumimoji="0" lang="de-DE" altLang="de-DE" sz="1800" b="0" i="0" u="none" strike="noStrike" cap="none" normalizeH="0" baseline="0">
+              <a:ln>
+                <a:noFill/>
+              </a:ln>
+              <a:solidFill>
+                <a:schemeClr val="tx1"/>
+              </a:solidFill>
+              <a:effectLst/>
+              <a:latin typeface="Arial" panose="020B0604020202020204" pitchFamily="34" charset="0"/>
+            </a:endParaRPr>
+          </a:p>
+        </p:txBody>
+      </p:sp>
+    </p:spTree>
+    <p:extLst>
+      <p:ext uri="{BB962C8B-B14F-4D97-AF65-F5344CB8AC3E}">
+        <p14:creationId xmlns:p14="http://schemas.microsoft.com/office/powerpoint/2010/main" val="2144589906"/>
+      </p:ext>
+    </p:extLst>
+  </p:cSld>
+  <p:clrMapOvr>
+    <a:overrideClrMapping bg1="lt1" tx1="dk1" bg2="dk2" tx2="lt2" accent1="accent1" accent2="accent2" accent3="accent3" accent4="accent4" accent5="accent5" accent6="accent6" hlink="hlink" folHlink="folHlink"/>
+  </p:clrMapOvr>
+</p:sld>
+</file>
+
+<file path=ppt/slides/slide17.xml><?xml version="1.0" encoding="utf-8"?>
+<p:sld xmlns:a="http://schemas.openxmlformats.org/drawingml/2006/main" xmlns:r="http://schemas.openxmlformats.org/officeDocument/2006/relationships" xmlns:p="http://schemas.openxmlformats.org/presentationml/2006/main">
+  <p:cSld>
+    <p:bg>
+      <p:bgPr>
+        <a:blipFill>
+          <a:blip r:embed="rId4">
+            <a:alphaModFix/>
+          </a:blip>
+          <a:stretch>
+            <a:fillRect/>
+          </a:stretch>
+        </a:blipFill>
+        <a:effectLst/>
+      </p:bgPr>
+    </p:bg>
+    <p:spTree>
+      <p:nvGrpSpPr>
+        <p:cNvPr id="1" name="Shape 231">
+          <a:extLst>
+            <a:ext uri="{FF2B5EF4-FFF2-40B4-BE49-F238E27FC236}">
+              <a16:creationId xmlns:a16="http://schemas.microsoft.com/office/drawing/2014/main" id="{AC2B4E4D-5356-320C-D5FF-ED9CE811E598}"/>
+            </a:ext>
+          </a:extLst>
+        </p:cNvPr>
+        <p:cNvGrpSpPr/>
+        <p:nvPr/>
+      </p:nvGrpSpPr>
+      <p:grpSpPr>
+        <a:xfrm>
+          <a:off x="0" y="0"/>
+          <a:ext cx="0" cy="0"/>
+          <a:chOff x="0" y="0"/>
+          <a:chExt cx="0" cy="0"/>
+        </a:xfrm>
+      </p:grpSpPr>
+      <p:sp>
+        <p:nvSpPr>
+          <p:cNvPr id="232" name="Google Shape;232;p43">
+            <a:extLst>
+              <a:ext uri="{FF2B5EF4-FFF2-40B4-BE49-F238E27FC236}">
+                <a16:creationId xmlns:a16="http://schemas.microsoft.com/office/drawing/2014/main" id="{2A1DE64B-AF3B-F5A9-7081-633CF3BB754B}"/>
+              </a:ext>
+            </a:extLst>
+          </p:cNvPr>
+          <p:cNvSpPr txBox="1">
+            <a:spLocks noGrp="1"/>
+          </p:cNvSpPr>
+          <p:nvPr>
+            <p:ph type="body" idx="1"/>
+          </p:nvPr>
+        </p:nvSpPr>
+        <p:spPr>
+          <a:xfrm>
+            <a:off x="642050" y="2134799"/>
+            <a:ext cx="5308200" cy="2132401"/>
+          </a:xfrm>
+          <a:prstGeom prst="rect">
+            <a:avLst/>
+          </a:prstGeom>
+        </p:spPr>
+        <p:txBody>
+          <a:bodyPr spcFirstLastPara="1" wrap="square" lIns="91425" tIns="91425" rIns="91425" bIns="91425" anchor="t" anchorCtr="0">
+            <a:noAutofit/>
+          </a:bodyPr>
+          <a:lstStyle/>
+          <a:p>
+            <a:pPr marL="0" lvl="0" indent="0">
+              <a:buNone/>
+            </a:pPr>
+            <a:r>
+              <a:rPr lang="de-DE" b="1" dirty="0" err="1"/>
+              <a:t>Example</a:t>
+            </a:r>
+            <a:r>
+              <a:rPr lang="en" dirty="0"/>
+              <a:t>:</a:t>
+            </a:r>
+            <a:endParaRPr dirty="0"/>
+          </a:p>
+          <a:p>
+            <a:pPr marL="0" indent="0">
+              <a:spcBef>
+                <a:spcPts val="1600"/>
+              </a:spcBef>
+              <a:buNone/>
+            </a:pPr>
+            <a:endParaRPr lang="en-US" dirty="0"/>
+          </a:p>
+          <a:p>
+            <a:pPr marL="0" lvl="0" indent="0" algn="l" rtl="0">
+              <a:spcBef>
+                <a:spcPts val="1600"/>
+              </a:spcBef>
+              <a:spcAft>
+                <a:spcPts val="1600"/>
+              </a:spcAft>
+              <a:buNone/>
+            </a:pPr>
+            <a:endParaRPr dirty="0"/>
+          </a:p>
+        </p:txBody>
+      </p:sp>
+      <p:sp>
+        <p:nvSpPr>
+          <p:cNvPr id="233" name="Google Shape;233;p43">
+            <a:extLst>
+              <a:ext uri="{FF2B5EF4-FFF2-40B4-BE49-F238E27FC236}">
+                <a16:creationId xmlns:a16="http://schemas.microsoft.com/office/drawing/2014/main" id="{BB1B3035-94FC-1ABB-EA1A-6B108F61CB16}"/>
+              </a:ext>
+            </a:extLst>
+          </p:cNvPr>
+          <p:cNvSpPr txBox="1">
+            <a:spLocks noGrp="1"/>
+          </p:cNvSpPr>
+          <p:nvPr>
+            <p:ph type="ctrTitle"/>
+          </p:nvPr>
+        </p:nvSpPr>
+        <p:spPr>
+          <a:prstGeom prst="rect">
+            <a:avLst/>
+          </a:prstGeom>
+        </p:spPr>
+        <p:txBody>
+          <a:bodyPr spcFirstLastPara="1" wrap="square" lIns="91425" tIns="91425" rIns="91425" bIns="91425" anchor="t" anchorCtr="0">
+            <a:noAutofit/>
+          </a:bodyPr>
+          <a:lstStyle/>
+          <a:p>
+            <a:pPr lvl="0"/>
+            <a:r>
+              <a:rPr lang="en" dirty="0"/>
+              <a:t>All about Null values,</a:t>
+            </a:r>
+            <a:br>
+              <a:rPr lang="en" dirty="0"/>
+            </a:br>
+            <a:r>
+              <a:rPr lang="de-DE" dirty="0" err="1"/>
+              <a:t>Example</a:t>
+            </a:r>
+            <a:r>
+              <a:rPr lang="de-DE" dirty="0"/>
+              <a:t>:</a:t>
+            </a:r>
+            <a:br>
+              <a:rPr lang="en" dirty="0"/>
+            </a:br>
+            <a:endParaRPr dirty="0"/>
+          </a:p>
+        </p:txBody>
+      </p:sp>
+      <p:sp>
+        <p:nvSpPr>
+          <p:cNvPr id="2" name="Rectangle 1">
+            <a:extLst>
+              <a:ext uri="{FF2B5EF4-FFF2-40B4-BE49-F238E27FC236}">
+                <a16:creationId xmlns:a16="http://schemas.microsoft.com/office/drawing/2014/main" id="{56748F3A-D880-20C1-F214-1CB5DD5294B5}"/>
+              </a:ext>
+            </a:extLst>
+          </p:cNvPr>
+          <p:cNvSpPr>
+            <a:spLocks noChangeArrowheads="1"/>
+          </p:cNvSpPr>
+          <p:nvPr/>
+        </p:nvSpPr>
+        <p:spPr bwMode="auto">
+          <a:xfrm>
+            <a:off x="0" y="0"/>
+            <a:ext cx="9144000" cy="0"/>
+          </a:xfrm>
+          <a:prstGeom prst="rect">
+            <a:avLst/>
+          </a:prstGeom>
+          <a:noFill/>
+          <a:ln>
+            <a:noFill/>
+          </a:ln>
+          <a:effectLst/>
+          <a:extLst>
+            <a:ext uri="{909E8E84-426E-40DD-AFC4-6F175D3DCCD1}">
+              <a14:hiddenFill xmlns:a14="http://schemas.microsoft.com/office/drawing/2010/main">
+                <a:solidFill>
+                  <a:schemeClr val="accent1"/>
+                </a:solidFill>
+              </a14:hiddenFill>
+            </a:ext>
+            <a:ext uri="{91240B29-F687-4F45-9708-019B960494DF}">
+              <a14:hiddenLine xmlns:a14="http://schemas.microsoft.com/office/drawing/2010/main" w="9525">
+                <a:solidFill>
+                  <a:schemeClr val="tx1"/>
+                </a:solidFill>
+                <a:miter lim="800000"/>
+                <a:headEnd/>
+                <a:tailEnd/>
+              </a14:hiddenLine>
+            </a:ext>
+            <a:ext uri="{AF507438-7753-43E0-B8FC-AC1667EBCBE1}">
+              <a14:hiddenEffects xmlns:a14="http://schemas.microsoft.com/office/drawing/2010/main">
+                <a:effectLst>
+                  <a:outerShdw dist="35921" dir="2700000" algn="ctr" rotWithShape="0">
+                    <a:schemeClr val="bg2"/>
+                  </a:outerShdw>
+                </a:effectLst>
+              </a14:hiddenEffects>
+            </a:ext>
+          </a:extLst>
+        </p:spPr>
+        <p:txBody>
+          <a:bodyPr vert="horz" wrap="none" lIns="91440" tIns="45720" rIns="91440" bIns="45720" numCol="1" anchor="ctr" anchorCtr="0" compatLnSpc="1">
+            <a:prstTxWarp prst="textNoShape">
+              <a:avLst/>
+            </a:prstTxWarp>
+            <a:spAutoFit/>
+          </a:bodyPr>
+          <a:lstStyle/>
+          <a:p>
+            <a:pPr marL="0" marR="0" lvl="0" indent="0" algn="l" defTabSz="914400" rtl="0" eaLnBrk="0" fontAlgn="base" latinLnBrk="0" hangingPunct="0">
+              <a:lnSpc>
+                <a:spcPct val="100000"/>
+              </a:lnSpc>
+              <a:spcBef>
+                <a:spcPct val="0"/>
+              </a:spcBef>
+              <a:spcAft>
+                <a:spcPct val="0"/>
+              </a:spcAft>
+              <a:buClrTx/>
+              <a:buSzTx/>
+              <a:buFontTx/>
+              <a:buChar char="•"/>
+              <a:tabLst/>
+            </a:pPr>
+            <a:r>
+              <a:rPr kumimoji="0" lang="de-DE" altLang="de-DE" sz="1000" b="0" i="0" u="none" strike="noStrike" cap="none" normalizeH="0" baseline="0">
+                <a:ln>
+                  <a:noFill/>
+                </a:ln>
+                <a:solidFill>
+                  <a:schemeClr val="tx1"/>
+                </a:solidFill>
+                <a:effectLst/>
+                <a:latin typeface="Arial Unicode MS"/>
+              </a:rPr>
+              <a:t>df.isnull().sum()</a:t>
+            </a:r>
+            <a:br>
+              <a:rPr kumimoji="0" lang="de-DE" altLang="de-DE" sz="200" b="0" i="0" u="none" strike="noStrike" cap="none" normalizeH="0" baseline="0">
+                <a:ln>
+                  <a:noFill/>
+                </a:ln>
+                <a:solidFill>
+                  <a:schemeClr val="tx1"/>
+                </a:solidFill>
+                <a:effectLst/>
+              </a:rPr>
+            </a:br>
+            <a:r>
+              <a:rPr kumimoji="0" lang="de-DE" altLang="de-DE" sz="200" b="0" i="0" u="none" strike="noStrike" cap="none" normalizeH="0" baseline="0">
+                <a:ln>
+                  <a:noFill/>
+                </a:ln>
+                <a:solidFill>
+                  <a:schemeClr val="tx1"/>
+                </a:solidFill>
+                <a:effectLst/>
+              </a:rPr>
+              <a:t>gives the number of missing values (NaN) in each column.</a:t>
+            </a:r>
+            <a:endParaRPr kumimoji="0" lang="de-DE" altLang="de-DE" sz="1800" b="0" i="0" u="none" strike="noStrike" cap="none" normalizeH="0" baseline="0">
+              <a:ln>
+                <a:noFill/>
+              </a:ln>
+              <a:solidFill>
+                <a:schemeClr val="tx1"/>
+              </a:solidFill>
+              <a:effectLst/>
+              <a:latin typeface="Arial" panose="020B0604020202020204" pitchFamily="34" charset="0"/>
+            </a:endParaRPr>
+          </a:p>
+          <a:p>
+            <a:pPr marL="0" marR="0" lvl="0" indent="0" algn="l" defTabSz="914400" rtl="0" eaLnBrk="0" fontAlgn="base" latinLnBrk="0" hangingPunct="0">
+              <a:lnSpc>
+                <a:spcPct val="100000"/>
+              </a:lnSpc>
+              <a:spcBef>
+                <a:spcPct val="0"/>
+              </a:spcBef>
+              <a:spcAft>
+                <a:spcPct val="0"/>
+              </a:spcAft>
+              <a:buClrTx/>
+              <a:buSzTx/>
+              <a:buFontTx/>
+              <a:buChar char="•"/>
+              <a:tabLst/>
+            </a:pPr>
+            <a:r>
+              <a:rPr kumimoji="0" lang="de-DE" altLang="de-DE" sz="1000" b="0" i="0" u="none" strike="noStrike" cap="none" normalizeH="0" baseline="0">
+                <a:ln>
+                  <a:noFill/>
+                </a:ln>
+                <a:solidFill>
+                  <a:schemeClr val="tx1"/>
+                </a:solidFill>
+                <a:effectLst/>
+                <a:latin typeface="Arial Unicode MS"/>
+              </a:rPr>
+              <a:t>df.count()</a:t>
+            </a:r>
+            <a:br>
+              <a:rPr kumimoji="0" lang="de-DE" altLang="de-DE" sz="200" b="0" i="0" u="none" strike="noStrike" cap="none" normalizeH="0" baseline="0">
+                <a:ln>
+                  <a:noFill/>
+                </a:ln>
+                <a:solidFill>
+                  <a:schemeClr val="tx1"/>
+                </a:solidFill>
+                <a:effectLst/>
+              </a:rPr>
+            </a:br>
+            <a:r>
+              <a:rPr kumimoji="0" lang="de-DE" altLang="de-DE" sz="200" b="0" i="0" u="none" strike="noStrike" cap="none" normalizeH="0" baseline="0">
+                <a:ln>
+                  <a:noFill/>
+                </a:ln>
+                <a:solidFill>
+                  <a:schemeClr val="tx1"/>
+                </a:solidFill>
+                <a:effectLst/>
+              </a:rPr>
+              <a:t>gives the number of non-missing values in each column.</a:t>
+            </a:r>
+            <a:endParaRPr kumimoji="0" lang="de-DE" altLang="de-DE" sz="1800" b="0" i="0" u="none" strike="noStrike" cap="none" normalizeH="0" baseline="0">
+              <a:ln>
+                <a:noFill/>
+              </a:ln>
+              <a:solidFill>
+                <a:schemeClr val="tx1"/>
+              </a:solidFill>
+              <a:effectLst/>
+              <a:latin typeface="Arial" panose="020B0604020202020204" pitchFamily="34" charset="0"/>
+            </a:endParaRPr>
+          </a:p>
+          <a:p>
+            <a:pPr marL="0" marR="0" lvl="0" indent="0" algn="l" defTabSz="914400" rtl="0" eaLnBrk="0" fontAlgn="base" latinLnBrk="0" hangingPunct="0">
+              <a:lnSpc>
+                <a:spcPct val="100000"/>
+              </a:lnSpc>
+              <a:spcBef>
+                <a:spcPct val="0"/>
+              </a:spcBef>
+              <a:spcAft>
+                <a:spcPct val="0"/>
+              </a:spcAft>
+              <a:buClrTx/>
+              <a:buSzTx/>
+              <a:buFontTx/>
+              <a:buChar char="•"/>
+              <a:tabLst/>
+            </a:pPr>
+            <a:r>
+              <a:rPr kumimoji="0" lang="de-DE" altLang="de-DE" sz="1000" b="0" i="0" u="none" strike="noStrike" cap="none" normalizeH="0" baseline="0">
+                <a:ln>
+                  <a:noFill/>
+                </a:ln>
+                <a:solidFill>
+                  <a:schemeClr val="tx1"/>
+                </a:solidFill>
+                <a:effectLst/>
+                <a:latin typeface="Arial Unicode MS"/>
+              </a:rPr>
+              <a:t>df.shape[0]</a:t>
+            </a:r>
+            <a:br>
+              <a:rPr kumimoji="0" lang="de-DE" altLang="de-DE" sz="200" b="0" i="0" u="none" strike="noStrike" cap="none" normalizeH="0" baseline="0">
+                <a:ln>
+                  <a:noFill/>
+                </a:ln>
+                <a:solidFill>
+                  <a:schemeClr val="tx1"/>
+                </a:solidFill>
+                <a:effectLst/>
+              </a:rPr>
+            </a:br>
+            <a:r>
+              <a:rPr kumimoji="0" lang="de-DE" altLang="de-DE" sz="200" b="0" i="0" u="none" strike="noStrike" cap="none" normalizeH="0" baseline="0">
+                <a:ln>
+                  <a:noFill/>
+                </a:ln>
+                <a:solidFill>
+                  <a:schemeClr val="tx1"/>
+                </a:solidFill>
+                <a:effectLst/>
+              </a:rPr>
+              <a:t>gives the total number of rows in the DataFrame.</a:t>
+            </a:r>
+            <a:endParaRPr kumimoji="0" lang="de-DE" altLang="de-DE" sz="1800" b="0" i="0" u="none" strike="noStrike" cap="none" normalizeH="0" baseline="0">
+              <a:ln>
+                <a:noFill/>
+              </a:ln>
+              <a:solidFill>
+                <a:schemeClr val="tx1"/>
+              </a:solidFill>
+              <a:effectLst/>
+              <a:latin typeface="Arial" panose="020B0604020202020204" pitchFamily="34" charset="0"/>
+            </a:endParaRPr>
+          </a:p>
+        </p:txBody>
+      </p:sp>
+      <p:sp>
+        <p:nvSpPr>
+          <p:cNvPr id="3" name="Rectangle 2">
+            <a:extLst>
+              <a:ext uri="{FF2B5EF4-FFF2-40B4-BE49-F238E27FC236}">
+                <a16:creationId xmlns:a16="http://schemas.microsoft.com/office/drawing/2014/main" id="{EE6D9CDF-CB96-5DC2-09EB-D31984A99068}"/>
+              </a:ext>
+            </a:extLst>
+          </p:cNvPr>
+          <p:cNvSpPr>
+            <a:spLocks noChangeArrowheads="1"/>
+          </p:cNvSpPr>
+          <p:nvPr/>
+        </p:nvSpPr>
+        <p:spPr bwMode="auto">
+          <a:xfrm>
+            <a:off x="152400" y="152400"/>
+            <a:ext cx="9144000" cy="0"/>
+          </a:xfrm>
+          <a:prstGeom prst="rect">
+            <a:avLst/>
+          </a:prstGeom>
+          <a:noFill/>
+          <a:ln>
+            <a:noFill/>
+          </a:ln>
+          <a:effectLst/>
+          <a:extLst>
+            <a:ext uri="{909E8E84-426E-40DD-AFC4-6F175D3DCCD1}">
+              <a14:hiddenFill xmlns:a14="http://schemas.microsoft.com/office/drawing/2010/main">
+                <a:solidFill>
+                  <a:schemeClr val="accent1"/>
+                </a:solidFill>
+              </a14:hiddenFill>
+            </a:ext>
+            <a:ext uri="{91240B29-F687-4F45-9708-019B960494DF}">
+              <a14:hiddenLine xmlns:a14="http://schemas.microsoft.com/office/drawing/2010/main" w="9525">
+                <a:solidFill>
+                  <a:schemeClr val="tx1"/>
+                </a:solidFill>
+                <a:miter lim="800000"/>
+                <a:headEnd/>
+                <a:tailEnd/>
+              </a14:hiddenLine>
+            </a:ext>
+            <a:ext uri="{AF507438-7753-43E0-B8FC-AC1667EBCBE1}">
+              <a14:hiddenEffects xmlns:a14="http://schemas.microsoft.com/office/drawing/2010/main">
+                <a:effectLst>
+                  <a:outerShdw dist="35921" dir="2700000" algn="ctr" rotWithShape="0">
+                    <a:schemeClr val="bg2"/>
+                  </a:outerShdw>
+                </a:effectLst>
+              </a14:hiddenEffects>
+            </a:ext>
+          </a:extLst>
+        </p:spPr>
+        <p:txBody>
+          <a:bodyPr vert="horz" wrap="none" lIns="91440" tIns="45720" rIns="91440" bIns="45720" numCol="1" anchor="ctr" anchorCtr="0" compatLnSpc="1">
+            <a:prstTxWarp prst="textNoShape">
+              <a:avLst/>
+            </a:prstTxWarp>
+            <a:spAutoFit/>
+          </a:bodyPr>
+          <a:lstStyle/>
+          <a:p>
+            <a:pPr marL="0" marR="0" lvl="0" indent="0" algn="l" defTabSz="914400" rtl="0" eaLnBrk="0" fontAlgn="base" latinLnBrk="0" hangingPunct="0">
+              <a:lnSpc>
+                <a:spcPct val="100000"/>
+              </a:lnSpc>
+              <a:spcBef>
+                <a:spcPct val="0"/>
+              </a:spcBef>
+              <a:spcAft>
+                <a:spcPct val="0"/>
+              </a:spcAft>
+              <a:buClrTx/>
+              <a:buSzTx/>
+              <a:buFontTx/>
+              <a:buChar char="•"/>
+              <a:tabLst/>
+            </a:pPr>
+            <a:r>
+              <a:rPr kumimoji="0" lang="de-DE" altLang="de-DE" sz="1000" b="0" i="0" u="none" strike="noStrike" cap="none" normalizeH="0" baseline="0">
+                <a:ln>
+                  <a:noFill/>
+                </a:ln>
+                <a:solidFill>
+                  <a:schemeClr val="tx1"/>
+                </a:solidFill>
+                <a:effectLst/>
+                <a:latin typeface="Arial Unicode MS"/>
+              </a:rPr>
+              <a:t>df.isnull().sum()</a:t>
+            </a:r>
+            <a:br>
+              <a:rPr kumimoji="0" lang="de-DE" altLang="de-DE" sz="200" b="0" i="0" u="none" strike="noStrike" cap="none" normalizeH="0" baseline="0">
+                <a:ln>
+                  <a:noFill/>
+                </a:ln>
+                <a:solidFill>
+                  <a:schemeClr val="tx1"/>
+                </a:solidFill>
+                <a:effectLst/>
+              </a:rPr>
+            </a:br>
+            <a:r>
+              <a:rPr kumimoji="0" lang="de-DE" altLang="de-DE" sz="200" b="0" i="0" u="none" strike="noStrike" cap="none" normalizeH="0" baseline="0">
+                <a:ln>
+                  <a:noFill/>
+                </a:ln>
+                <a:solidFill>
+                  <a:schemeClr val="tx1"/>
+                </a:solidFill>
+                <a:effectLst/>
+              </a:rPr>
+              <a:t>gives the number of missing values (NaN) in each column.</a:t>
+            </a:r>
+            <a:endParaRPr kumimoji="0" lang="de-DE" altLang="de-DE" sz="1800" b="0" i="0" u="none" strike="noStrike" cap="none" normalizeH="0" baseline="0">
+              <a:ln>
+                <a:noFill/>
+              </a:ln>
+              <a:solidFill>
+                <a:schemeClr val="tx1"/>
+              </a:solidFill>
+              <a:effectLst/>
+              <a:latin typeface="Arial" panose="020B0604020202020204" pitchFamily="34" charset="0"/>
+            </a:endParaRPr>
+          </a:p>
+          <a:p>
+            <a:pPr marL="0" marR="0" lvl="0" indent="0" algn="l" defTabSz="914400" rtl="0" eaLnBrk="0" fontAlgn="base" latinLnBrk="0" hangingPunct="0">
+              <a:lnSpc>
+                <a:spcPct val="100000"/>
+              </a:lnSpc>
+              <a:spcBef>
+                <a:spcPct val="0"/>
+              </a:spcBef>
+              <a:spcAft>
+                <a:spcPct val="0"/>
+              </a:spcAft>
+              <a:buClrTx/>
+              <a:buSzTx/>
+              <a:buFontTx/>
+              <a:buChar char="•"/>
+              <a:tabLst/>
+            </a:pPr>
+            <a:r>
+              <a:rPr kumimoji="0" lang="de-DE" altLang="de-DE" sz="1000" b="0" i="0" u="none" strike="noStrike" cap="none" normalizeH="0" baseline="0">
+                <a:ln>
+                  <a:noFill/>
+                </a:ln>
+                <a:solidFill>
+                  <a:schemeClr val="tx1"/>
+                </a:solidFill>
+                <a:effectLst/>
+                <a:latin typeface="Arial Unicode MS"/>
+              </a:rPr>
+              <a:t>df.count()</a:t>
+            </a:r>
+            <a:br>
+              <a:rPr kumimoji="0" lang="de-DE" altLang="de-DE" sz="200" b="0" i="0" u="none" strike="noStrike" cap="none" normalizeH="0" baseline="0">
+                <a:ln>
+                  <a:noFill/>
+                </a:ln>
+                <a:solidFill>
+                  <a:schemeClr val="tx1"/>
+                </a:solidFill>
+                <a:effectLst/>
+              </a:rPr>
+            </a:br>
+            <a:r>
+              <a:rPr kumimoji="0" lang="de-DE" altLang="de-DE" sz="200" b="0" i="0" u="none" strike="noStrike" cap="none" normalizeH="0" baseline="0">
+                <a:ln>
+                  <a:noFill/>
+                </a:ln>
+                <a:solidFill>
+                  <a:schemeClr val="tx1"/>
+                </a:solidFill>
+                <a:effectLst/>
+              </a:rPr>
+              <a:t>gives the number of non-missing values in each column.</a:t>
+            </a:r>
+            <a:endParaRPr kumimoji="0" lang="de-DE" altLang="de-DE" sz="1800" b="0" i="0" u="none" strike="noStrike" cap="none" normalizeH="0" baseline="0">
+              <a:ln>
+                <a:noFill/>
+              </a:ln>
+              <a:solidFill>
+                <a:schemeClr val="tx1"/>
+              </a:solidFill>
+              <a:effectLst/>
+              <a:latin typeface="Arial" panose="020B0604020202020204" pitchFamily="34" charset="0"/>
+            </a:endParaRPr>
+          </a:p>
+          <a:p>
+            <a:pPr marL="0" marR="0" lvl="0" indent="0" algn="l" defTabSz="914400" rtl="0" eaLnBrk="0" fontAlgn="base" latinLnBrk="0" hangingPunct="0">
+              <a:lnSpc>
+                <a:spcPct val="100000"/>
+              </a:lnSpc>
+              <a:spcBef>
+                <a:spcPct val="0"/>
+              </a:spcBef>
+              <a:spcAft>
+                <a:spcPct val="0"/>
+              </a:spcAft>
+              <a:buClrTx/>
+              <a:buSzTx/>
+              <a:buFontTx/>
+              <a:buChar char="•"/>
+              <a:tabLst/>
+            </a:pPr>
+            <a:r>
+              <a:rPr kumimoji="0" lang="de-DE" altLang="de-DE" sz="1000" b="0" i="0" u="none" strike="noStrike" cap="none" normalizeH="0" baseline="0">
+                <a:ln>
+                  <a:noFill/>
+                </a:ln>
+                <a:solidFill>
+                  <a:schemeClr val="tx1"/>
+                </a:solidFill>
+                <a:effectLst/>
+                <a:latin typeface="Arial Unicode MS"/>
+              </a:rPr>
+              <a:t>df.shape[0]</a:t>
+            </a:r>
+            <a:br>
+              <a:rPr kumimoji="0" lang="de-DE" altLang="de-DE" sz="200" b="0" i="0" u="none" strike="noStrike" cap="none" normalizeH="0" baseline="0">
+                <a:ln>
+                  <a:noFill/>
+                </a:ln>
+                <a:solidFill>
+                  <a:schemeClr val="tx1"/>
+                </a:solidFill>
+                <a:effectLst/>
+              </a:rPr>
+            </a:br>
+            <a:r>
+              <a:rPr kumimoji="0" lang="de-DE" altLang="de-DE" sz="200" b="0" i="0" u="none" strike="noStrike" cap="none" normalizeH="0" baseline="0">
+                <a:ln>
+                  <a:noFill/>
+                </a:ln>
+                <a:solidFill>
+                  <a:schemeClr val="tx1"/>
+                </a:solidFill>
+                <a:effectLst/>
+              </a:rPr>
+              <a:t>gives the total number of rows in the DataFrame.</a:t>
+            </a:r>
+            <a:endParaRPr kumimoji="0" lang="de-DE" altLang="de-DE" sz="1800" b="0" i="0" u="none" strike="noStrike" cap="none" normalizeH="0" baseline="0">
+              <a:ln>
+                <a:noFill/>
+              </a:ln>
+              <a:solidFill>
+                <a:schemeClr val="tx1"/>
+              </a:solidFill>
+              <a:effectLst/>
+              <a:latin typeface="Arial" panose="020B0604020202020204" pitchFamily="34" charset="0"/>
+            </a:endParaRPr>
+          </a:p>
+        </p:txBody>
+      </p:sp>
+      <p:sp>
+        <p:nvSpPr>
+          <p:cNvPr id="4" name="Textfeld 3">
+            <a:extLst>
+              <a:ext uri="{FF2B5EF4-FFF2-40B4-BE49-F238E27FC236}">
+                <a16:creationId xmlns:a16="http://schemas.microsoft.com/office/drawing/2014/main" id="{451FE588-E9BE-CB33-9D29-D83456C3CE2D}"/>
+              </a:ext>
+            </a:extLst>
+          </p:cNvPr>
+          <p:cNvSpPr txBox="1"/>
+          <p:nvPr/>
+        </p:nvSpPr>
+        <p:spPr>
+          <a:xfrm>
+            <a:off x="871870" y="2571750"/>
+            <a:ext cx="6202325" cy="1754326"/>
+          </a:xfrm>
+          <a:prstGeom prst="rect">
+            <a:avLst/>
+          </a:prstGeom>
+          <a:noFill/>
+        </p:spPr>
+        <p:txBody>
+          <a:bodyPr wrap="square" rtlCol="0">
+            <a:spAutoFit/>
+          </a:bodyPr>
+          <a:lstStyle/>
+          <a:p>
+            <a:r>
+              <a:rPr lang="de-DE" sz="1200" dirty="0" err="1">
+                <a:solidFill>
+                  <a:schemeClr val="tx1"/>
+                </a:solidFill>
+              </a:rPr>
+              <a:t>import</a:t>
+            </a:r>
+            <a:r>
+              <a:rPr lang="de-DE" sz="1200" dirty="0">
+                <a:solidFill>
+                  <a:schemeClr val="tx1"/>
+                </a:solidFill>
+              </a:rPr>
+              <a:t> </a:t>
+            </a:r>
+            <a:r>
+              <a:rPr lang="de-DE" sz="1200" dirty="0" err="1">
+                <a:solidFill>
+                  <a:schemeClr val="tx1"/>
+                </a:solidFill>
+              </a:rPr>
+              <a:t>pandas</a:t>
+            </a:r>
+            <a:r>
+              <a:rPr lang="de-DE" sz="1200" dirty="0">
+                <a:solidFill>
+                  <a:schemeClr val="tx1"/>
+                </a:solidFill>
+              </a:rPr>
+              <a:t> </a:t>
+            </a:r>
+            <a:r>
+              <a:rPr lang="de-DE" sz="1200" dirty="0" err="1">
+                <a:solidFill>
+                  <a:schemeClr val="tx1"/>
+                </a:solidFill>
+              </a:rPr>
+              <a:t>as</a:t>
+            </a:r>
+            <a:r>
+              <a:rPr lang="de-DE" sz="1200" dirty="0">
+                <a:solidFill>
+                  <a:schemeClr val="tx1"/>
+                </a:solidFill>
+              </a:rPr>
+              <a:t> </a:t>
+            </a:r>
+            <a:r>
+              <a:rPr lang="de-DE" sz="1200" dirty="0" err="1">
+                <a:solidFill>
+                  <a:schemeClr val="tx1"/>
+                </a:solidFill>
+              </a:rPr>
+              <a:t>pd</a:t>
+            </a:r>
+            <a:endParaRPr lang="de-DE" sz="1200" dirty="0">
+              <a:solidFill>
+                <a:schemeClr val="tx1"/>
+              </a:solidFill>
+            </a:endParaRPr>
+          </a:p>
+          <a:p>
+            <a:endParaRPr lang="de-DE" sz="1200" dirty="0">
+              <a:solidFill>
+                <a:schemeClr val="tx1"/>
+              </a:solidFill>
+            </a:endParaRPr>
+          </a:p>
+          <a:p>
+            <a:r>
+              <a:rPr lang="de-DE" sz="1200" dirty="0" err="1">
+                <a:solidFill>
+                  <a:schemeClr val="tx1"/>
+                </a:solidFill>
+              </a:rPr>
+              <a:t>df</a:t>
+            </a:r>
+            <a:r>
+              <a:rPr lang="de-DE" sz="1200" dirty="0">
+                <a:solidFill>
+                  <a:schemeClr val="tx1"/>
+                </a:solidFill>
+              </a:rPr>
+              <a:t> = </a:t>
+            </a:r>
+            <a:r>
+              <a:rPr lang="de-DE" sz="1200" dirty="0" err="1">
+                <a:solidFill>
+                  <a:schemeClr val="tx1"/>
+                </a:solidFill>
+              </a:rPr>
+              <a:t>pd.DataFrame</a:t>
+            </a:r>
+            <a:r>
+              <a:rPr lang="de-DE" sz="1200" dirty="0">
+                <a:solidFill>
+                  <a:schemeClr val="tx1"/>
+                </a:solidFill>
+              </a:rPr>
+              <a:t>({</a:t>
+            </a:r>
+          </a:p>
+          <a:p>
+            <a:r>
+              <a:rPr lang="de-DE" sz="1200" dirty="0">
+                <a:solidFill>
+                  <a:schemeClr val="tx1"/>
+                </a:solidFill>
+              </a:rPr>
+              <a:t>    'A': [1, 2, None, 4],</a:t>
+            </a:r>
+          </a:p>
+          <a:p>
+            <a:r>
+              <a:rPr lang="de-DE" sz="1200" dirty="0">
+                <a:solidFill>
+                  <a:schemeClr val="tx1"/>
+                </a:solidFill>
+              </a:rPr>
+              <a:t>    'B': ['x', None, 'z', 'y']</a:t>
+            </a:r>
+          </a:p>
+          <a:p>
+            <a:r>
+              <a:rPr lang="de-DE" sz="1200" dirty="0">
+                <a:solidFill>
+                  <a:schemeClr val="tx1"/>
+                </a:solidFill>
+              </a:rPr>
+              <a:t>})</a:t>
+            </a:r>
+          </a:p>
+          <a:p>
+            <a:endParaRPr lang="de-DE" sz="1200" dirty="0">
+              <a:solidFill>
+                <a:schemeClr val="tx1"/>
+              </a:solidFill>
+            </a:endParaRPr>
+          </a:p>
+          <a:p>
+            <a:r>
+              <a:rPr lang="de-DE" sz="1200" dirty="0" err="1">
+                <a:solidFill>
+                  <a:schemeClr val="tx1"/>
+                </a:solidFill>
+              </a:rPr>
+              <a:t>df.isnull</a:t>
+            </a:r>
+            <a:r>
+              <a:rPr lang="de-DE" sz="1200" dirty="0">
+                <a:solidFill>
+                  <a:schemeClr val="tx1"/>
+                </a:solidFill>
+              </a:rPr>
+              <a:t>().</a:t>
+            </a:r>
+            <a:r>
+              <a:rPr lang="de-DE" sz="1200" dirty="0" err="1">
+                <a:solidFill>
+                  <a:schemeClr val="tx1"/>
+                </a:solidFill>
+              </a:rPr>
+              <a:t>sum</a:t>
+            </a:r>
+            <a:r>
+              <a:rPr lang="de-DE" sz="1200" dirty="0">
+                <a:solidFill>
+                  <a:schemeClr val="tx1"/>
+                </a:solidFill>
+              </a:rPr>
+              <a:t>()   # </a:t>
+            </a:r>
+            <a:r>
+              <a:rPr lang="de-DE" sz="1200" dirty="0" err="1">
+                <a:solidFill>
+                  <a:schemeClr val="tx1"/>
+                </a:solidFill>
+              </a:rPr>
+              <a:t>count</a:t>
+            </a:r>
+            <a:r>
+              <a:rPr lang="de-DE" sz="1200" dirty="0">
+                <a:solidFill>
+                  <a:schemeClr val="tx1"/>
+                </a:solidFill>
+              </a:rPr>
+              <a:t> </a:t>
+            </a:r>
+            <a:r>
+              <a:rPr lang="de-DE" sz="1200" dirty="0" err="1">
+                <a:solidFill>
+                  <a:schemeClr val="tx1"/>
+                </a:solidFill>
+              </a:rPr>
+              <a:t>missing</a:t>
+            </a:r>
+            <a:r>
+              <a:rPr lang="de-DE" sz="1200" dirty="0">
+                <a:solidFill>
+                  <a:schemeClr val="tx1"/>
+                </a:solidFill>
+              </a:rPr>
+              <a:t> </a:t>
+            </a:r>
+            <a:r>
+              <a:rPr lang="de-DE" sz="1200" dirty="0" err="1">
+                <a:solidFill>
+                  <a:schemeClr val="tx1"/>
+                </a:solidFill>
+              </a:rPr>
+              <a:t>values</a:t>
+            </a:r>
+            <a:endParaRPr lang="de-DE" sz="1200" dirty="0">
+              <a:solidFill>
+                <a:schemeClr val="tx1"/>
+              </a:solidFill>
+            </a:endParaRPr>
+          </a:p>
+          <a:p>
+            <a:r>
+              <a:rPr lang="de-DE" sz="1200" dirty="0" err="1">
+                <a:solidFill>
+                  <a:schemeClr val="tx1"/>
+                </a:solidFill>
+              </a:rPr>
+              <a:t>df.count</a:t>
+            </a:r>
+            <a:r>
+              <a:rPr lang="de-DE" sz="1200" dirty="0">
+                <a:solidFill>
+                  <a:schemeClr val="tx1"/>
+                </a:solidFill>
+              </a:rPr>
+              <a:t>()          # </a:t>
+            </a:r>
+            <a:r>
+              <a:rPr lang="de-DE" sz="1200" dirty="0" err="1">
+                <a:solidFill>
+                  <a:schemeClr val="tx1"/>
+                </a:solidFill>
+              </a:rPr>
+              <a:t>count</a:t>
+            </a:r>
+            <a:r>
+              <a:rPr lang="de-DE" sz="1200" dirty="0">
+                <a:solidFill>
+                  <a:schemeClr val="tx1"/>
+                </a:solidFill>
+              </a:rPr>
+              <a:t> non-</a:t>
+            </a:r>
+            <a:r>
+              <a:rPr lang="de-DE" sz="1200" dirty="0" err="1">
+                <a:solidFill>
+                  <a:schemeClr val="tx1"/>
+                </a:solidFill>
+              </a:rPr>
+              <a:t>missing</a:t>
+            </a:r>
+            <a:r>
+              <a:rPr lang="de-DE" sz="1200" dirty="0">
+                <a:solidFill>
+                  <a:schemeClr val="tx1"/>
+                </a:solidFill>
+              </a:rPr>
+              <a:t> </a:t>
+            </a:r>
+            <a:r>
+              <a:rPr lang="de-DE" sz="1200" dirty="0" err="1">
+                <a:solidFill>
+                  <a:schemeClr val="tx1"/>
+                </a:solidFill>
+              </a:rPr>
+              <a:t>values</a:t>
+            </a:r>
+            <a:endParaRPr lang="de-DE" sz="1200" dirty="0">
+              <a:solidFill>
+                <a:schemeClr val="tx1"/>
+              </a:solidFill>
+            </a:endParaRPr>
+          </a:p>
+        </p:txBody>
+      </p:sp>
+    </p:spTree>
+    <p:extLst>
+      <p:ext uri="{BB962C8B-B14F-4D97-AF65-F5344CB8AC3E}">
+        <p14:creationId xmlns:p14="http://schemas.microsoft.com/office/powerpoint/2010/main" val="1716952464"/>
+      </p:ext>
+    </p:extLst>
+  </p:cSld>
+  <p:clrMapOvr>
+    <a:overrideClrMapping bg1="lt1" tx1="dk1" bg2="dk2" tx2="lt2" accent1="accent1" accent2="accent2" accent3="accent3" accent4="accent4" accent5="accent5" accent6="accent6" hlink="hlink" folHlink="folHlink"/>
+  </p:clrMapOvr>
+</p:sld>
+</file>
+
+<file path=ppt/slides/slide18.xml><?xml version="1.0" encoding="utf-8"?>
+<p:sld xmlns:a="http://schemas.openxmlformats.org/drawingml/2006/main" xmlns:r="http://schemas.openxmlformats.org/officeDocument/2006/relationships" xmlns:p="http://schemas.openxmlformats.org/presentationml/2006/main">
+  <p:cSld>
+    <p:bg>
+      <p:bgPr>
+        <a:blipFill>
+          <a:blip r:embed="rId4">
+            <a:alphaModFix/>
+          </a:blip>
+          <a:stretch>
+            <a:fillRect/>
+          </a:stretch>
+        </a:blipFill>
+        <a:effectLst/>
+      </p:bgPr>
+    </p:bg>
+    <p:spTree>
+      <p:nvGrpSpPr>
+        <p:cNvPr id="1" name="Shape 231">
+          <a:extLst>
+            <a:ext uri="{FF2B5EF4-FFF2-40B4-BE49-F238E27FC236}">
+              <a16:creationId xmlns:a16="http://schemas.microsoft.com/office/drawing/2014/main" id="{96437DD2-27BD-A7A6-C909-991B97D985B0}"/>
+            </a:ext>
+          </a:extLst>
+        </p:cNvPr>
+        <p:cNvGrpSpPr/>
+        <p:nvPr/>
+      </p:nvGrpSpPr>
+      <p:grpSpPr>
+        <a:xfrm>
+          <a:off x="0" y="0"/>
+          <a:ext cx="0" cy="0"/>
+          <a:chOff x="0" y="0"/>
+          <a:chExt cx="0" cy="0"/>
+        </a:xfrm>
+      </p:grpSpPr>
+      <p:sp>
+        <p:nvSpPr>
+          <p:cNvPr id="232" name="Google Shape;232;p43">
+            <a:extLst>
+              <a:ext uri="{FF2B5EF4-FFF2-40B4-BE49-F238E27FC236}">
+                <a16:creationId xmlns:a16="http://schemas.microsoft.com/office/drawing/2014/main" id="{2C99F737-C917-7B9E-8CE8-01863257677F}"/>
+              </a:ext>
+            </a:extLst>
+          </p:cNvPr>
+          <p:cNvSpPr txBox="1">
+            <a:spLocks noGrp="1"/>
+          </p:cNvSpPr>
+          <p:nvPr>
+            <p:ph type="body" idx="1"/>
+          </p:nvPr>
+        </p:nvSpPr>
+        <p:spPr>
+          <a:xfrm>
+            <a:off x="642050" y="1431857"/>
+            <a:ext cx="5308200" cy="2835344"/>
+          </a:xfrm>
+          <a:prstGeom prst="rect">
+            <a:avLst/>
+          </a:prstGeom>
+        </p:spPr>
+        <p:txBody>
+          <a:bodyPr spcFirstLastPara="1" wrap="square" lIns="91425" tIns="91425" rIns="91425" bIns="91425" anchor="t" anchorCtr="0">
+            <a:noAutofit/>
+          </a:bodyPr>
+          <a:lstStyle/>
+          <a:p>
+            <a:pPr marL="0" lvl="0" indent="0">
+              <a:buNone/>
+            </a:pPr>
+            <a:r>
+              <a:rPr lang="de-DE" b="1" dirty="0"/>
+              <a:t>W3Schools</a:t>
+            </a:r>
+            <a:r>
+              <a:rPr lang="en" dirty="0"/>
+              <a:t>:</a:t>
+            </a:r>
+            <a:endParaRPr dirty="0"/>
+          </a:p>
+          <a:p>
+            <a:pPr marL="171450" indent="-171450">
+              <a:spcBef>
+                <a:spcPts val="1600"/>
+              </a:spcBef>
+            </a:pPr>
+            <a:r>
+              <a:rPr lang="de-DE" dirty="0"/>
+              <a:t>Dictionary</a:t>
+            </a:r>
+          </a:p>
+          <a:p>
+            <a:pPr marL="171450" indent="-171450">
+              <a:spcBef>
+                <a:spcPts val="1600"/>
+              </a:spcBef>
+            </a:pPr>
+            <a:r>
+              <a:rPr lang="de-DE" dirty="0"/>
+              <a:t>Pandas Series</a:t>
+            </a:r>
+            <a:endParaRPr lang="en-US" dirty="0"/>
+          </a:p>
+          <a:p>
+            <a:pPr marL="171450" indent="-171450">
+              <a:spcBef>
+                <a:spcPts val="1600"/>
+              </a:spcBef>
+            </a:pPr>
+            <a:r>
+              <a:rPr lang="de-DE" dirty="0"/>
+              <a:t>Pandas </a:t>
+            </a:r>
+            <a:r>
+              <a:rPr lang="de-DE" dirty="0" err="1"/>
+              <a:t>DataFrames</a:t>
+            </a:r>
+            <a:endParaRPr lang="en-US" dirty="0"/>
+          </a:p>
+          <a:p>
+            <a:pPr marL="171450" indent="-171450">
+              <a:spcBef>
+                <a:spcPts val="1600"/>
+              </a:spcBef>
+            </a:pPr>
+            <a:r>
+              <a:rPr lang="de-DE" dirty="0"/>
+              <a:t>Read JSON</a:t>
+            </a:r>
+          </a:p>
+          <a:p>
+            <a:pPr marL="171450" indent="-171450">
+              <a:spcBef>
+                <a:spcPts val="1600"/>
+              </a:spcBef>
+            </a:pPr>
+            <a:r>
+              <a:rPr lang="de-DE" dirty="0"/>
+              <a:t>Data </a:t>
+            </a:r>
+            <a:r>
+              <a:rPr lang="de-DE" dirty="0" err="1"/>
+              <a:t>Correlations</a:t>
+            </a:r>
+            <a:endParaRPr lang="de-DE" dirty="0"/>
+          </a:p>
+          <a:p>
+            <a:pPr marL="171450" indent="-171450">
+              <a:spcBef>
+                <a:spcPts val="1600"/>
+              </a:spcBef>
+            </a:pPr>
+            <a:r>
+              <a:rPr lang="de-DE" dirty="0" err="1"/>
+              <a:t>DataFrame</a:t>
+            </a:r>
+            <a:r>
+              <a:rPr lang="de-DE" dirty="0"/>
+              <a:t> </a:t>
+            </a:r>
+            <a:r>
+              <a:rPr lang="de-DE" dirty="0" err="1"/>
+              <a:t>apply</a:t>
+            </a:r>
+            <a:r>
+              <a:rPr lang="de-DE" dirty="0"/>
+              <a:t>() Method</a:t>
+            </a:r>
+            <a:endParaRPr lang="en-US" dirty="0"/>
+          </a:p>
+          <a:p>
+            <a:pPr marL="0" lvl="0" indent="0" algn="l" rtl="0">
+              <a:spcBef>
+                <a:spcPts val="1600"/>
+              </a:spcBef>
+              <a:spcAft>
+                <a:spcPts val="1600"/>
+              </a:spcAft>
+              <a:buNone/>
+            </a:pPr>
+            <a:endParaRPr dirty="0"/>
+          </a:p>
+        </p:txBody>
+      </p:sp>
+      <p:sp>
+        <p:nvSpPr>
+          <p:cNvPr id="233" name="Google Shape;233;p43">
+            <a:extLst>
+              <a:ext uri="{FF2B5EF4-FFF2-40B4-BE49-F238E27FC236}">
+                <a16:creationId xmlns:a16="http://schemas.microsoft.com/office/drawing/2014/main" id="{09B302E7-FB99-459F-E19A-7EF42334C9F2}"/>
+              </a:ext>
+            </a:extLst>
+          </p:cNvPr>
+          <p:cNvSpPr txBox="1">
+            <a:spLocks noGrp="1"/>
+          </p:cNvSpPr>
+          <p:nvPr>
+            <p:ph type="ctrTitle"/>
+          </p:nvPr>
+        </p:nvSpPr>
+        <p:spPr>
+          <a:prstGeom prst="rect">
+            <a:avLst/>
+          </a:prstGeom>
+        </p:spPr>
+        <p:txBody>
+          <a:bodyPr spcFirstLastPara="1" wrap="square" lIns="91425" tIns="91425" rIns="91425" bIns="91425" anchor="t" anchorCtr="0">
+            <a:noAutofit/>
+          </a:bodyPr>
+          <a:lstStyle/>
+          <a:p>
+            <a:pPr lvl="0"/>
+            <a:r>
+              <a:rPr lang="de-DE" dirty="0"/>
+              <a:t>Additional Material,</a:t>
+            </a:r>
+            <a:br>
+              <a:rPr lang="de-DE" dirty="0"/>
+            </a:br>
+            <a:r>
+              <a:rPr lang="de-DE" dirty="0"/>
+              <a:t>W3Schools</a:t>
+            </a:r>
+            <a:br>
+              <a:rPr lang="en" dirty="0"/>
+            </a:br>
+            <a:endParaRPr dirty="0"/>
+          </a:p>
+        </p:txBody>
+      </p:sp>
+      <p:sp>
+        <p:nvSpPr>
+          <p:cNvPr id="2" name="Rectangle 1">
+            <a:extLst>
+              <a:ext uri="{FF2B5EF4-FFF2-40B4-BE49-F238E27FC236}">
+                <a16:creationId xmlns:a16="http://schemas.microsoft.com/office/drawing/2014/main" id="{FE198B73-FC1D-9A2D-A8A6-C5BF92282E4D}"/>
+              </a:ext>
+            </a:extLst>
+          </p:cNvPr>
+          <p:cNvSpPr>
+            <a:spLocks noChangeArrowheads="1"/>
+          </p:cNvSpPr>
+          <p:nvPr/>
+        </p:nvSpPr>
+        <p:spPr bwMode="auto">
+          <a:xfrm>
+            <a:off x="0" y="0"/>
+            <a:ext cx="9144000" cy="0"/>
+          </a:xfrm>
+          <a:prstGeom prst="rect">
+            <a:avLst/>
+          </a:prstGeom>
+          <a:noFill/>
+          <a:ln>
+            <a:noFill/>
+          </a:ln>
+          <a:effectLst/>
+          <a:extLst>
+            <a:ext uri="{909E8E84-426E-40DD-AFC4-6F175D3DCCD1}">
+              <a14:hiddenFill xmlns:a14="http://schemas.microsoft.com/office/drawing/2010/main">
+                <a:solidFill>
+                  <a:schemeClr val="accent1"/>
+                </a:solidFill>
+              </a14:hiddenFill>
+            </a:ext>
+            <a:ext uri="{91240B29-F687-4F45-9708-019B960494DF}">
+              <a14:hiddenLine xmlns:a14="http://schemas.microsoft.com/office/drawing/2010/main" w="9525">
+                <a:solidFill>
+                  <a:schemeClr val="tx1"/>
+                </a:solidFill>
+                <a:miter lim="800000"/>
+                <a:headEnd/>
+                <a:tailEnd/>
+              </a14:hiddenLine>
+            </a:ext>
+            <a:ext uri="{AF507438-7753-43E0-B8FC-AC1667EBCBE1}">
+              <a14:hiddenEffects xmlns:a14="http://schemas.microsoft.com/office/drawing/2010/main">
+                <a:effectLst>
+                  <a:outerShdw dist="35921" dir="2700000" algn="ctr" rotWithShape="0">
+                    <a:schemeClr val="bg2"/>
+                  </a:outerShdw>
+                </a:effectLst>
+              </a14:hiddenEffects>
+            </a:ext>
+          </a:extLst>
+        </p:spPr>
+        <p:txBody>
+          <a:bodyPr vert="horz" wrap="none" lIns="91440" tIns="45720" rIns="91440" bIns="45720" numCol="1" anchor="ctr" anchorCtr="0" compatLnSpc="1">
+            <a:prstTxWarp prst="textNoShape">
+              <a:avLst/>
+            </a:prstTxWarp>
+            <a:spAutoFit/>
+          </a:bodyPr>
+          <a:lstStyle/>
+          <a:p>
+            <a:pPr marL="0" marR="0" lvl="0" indent="0" algn="l" defTabSz="914400" rtl="0" eaLnBrk="0" fontAlgn="base" latinLnBrk="0" hangingPunct="0">
+              <a:lnSpc>
+                <a:spcPct val="100000"/>
+              </a:lnSpc>
+              <a:spcBef>
+                <a:spcPct val="0"/>
+              </a:spcBef>
+              <a:spcAft>
+                <a:spcPct val="0"/>
+              </a:spcAft>
+              <a:buClrTx/>
+              <a:buSzTx/>
+              <a:buFontTx/>
+              <a:buChar char="•"/>
+              <a:tabLst/>
+            </a:pPr>
+            <a:r>
+              <a:rPr kumimoji="0" lang="de-DE" altLang="de-DE" sz="1000" b="0" i="0" u="none" strike="noStrike" cap="none" normalizeH="0" baseline="0">
+                <a:ln>
+                  <a:noFill/>
+                </a:ln>
+                <a:solidFill>
+                  <a:schemeClr val="tx1"/>
+                </a:solidFill>
+                <a:effectLst/>
+                <a:latin typeface="Arial Unicode MS"/>
+              </a:rPr>
+              <a:t>df.isnull().sum()</a:t>
+            </a:r>
+            <a:br>
+              <a:rPr kumimoji="0" lang="de-DE" altLang="de-DE" sz="200" b="0" i="0" u="none" strike="noStrike" cap="none" normalizeH="0" baseline="0">
+                <a:ln>
+                  <a:noFill/>
+                </a:ln>
+                <a:solidFill>
+                  <a:schemeClr val="tx1"/>
+                </a:solidFill>
+                <a:effectLst/>
+              </a:rPr>
+            </a:br>
+            <a:r>
+              <a:rPr kumimoji="0" lang="de-DE" altLang="de-DE" sz="200" b="0" i="0" u="none" strike="noStrike" cap="none" normalizeH="0" baseline="0">
+                <a:ln>
+                  <a:noFill/>
+                </a:ln>
+                <a:solidFill>
+                  <a:schemeClr val="tx1"/>
+                </a:solidFill>
+                <a:effectLst/>
+              </a:rPr>
+              <a:t>gives the number of missing values (NaN) in each column.</a:t>
+            </a:r>
+            <a:endParaRPr kumimoji="0" lang="de-DE" altLang="de-DE" sz="1800" b="0" i="0" u="none" strike="noStrike" cap="none" normalizeH="0" baseline="0">
+              <a:ln>
+                <a:noFill/>
+              </a:ln>
+              <a:solidFill>
+                <a:schemeClr val="tx1"/>
+              </a:solidFill>
+              <a:effectLst/>
+              <a:latin typeface="Arial" panose="020B0604020202020204" pitchFamily="34" charset="0"/>
+            </a:endParaRPr>
+          </a:p>
+          <a:p>
+            <a:pPr marL="0" marR="0" lvl="0" indent="0" algn="l" defTabSz="914400" rtl="0" eaLnBrk="0" fontAlgn="base" latinLnBrk="0" hangingPunct="0">
+              <a:lnSpc>
+                <a:spcPct val="100000"/>
+              </a:lnSpc>
+              <a:spcBef>
+                <a:spcPct val="0"/>
+              </a:spcBef>
+              <a:spcAft>
+                <a:spcPct val="0"/>
+              </a:spcAft>
+              <a:buClrTx/>
+              <a:buSzTx/>
+              <a:buFontTx/>
+              <a:buChar char="•"/>
+              <a:tabLst/>
+            </a:pPr>
+            <a:r>
+              <a:rPr kumimoji="0" lang="de-DE" altLang="de-DE" sz="1000" b="0" i="0" u="none" strike="noStrike" cap="none" normalizeH="0" baseline="0">
+                <a:ln>
+                  <a:noFill/>
+                </a:ln>
+                <a:solidFill>
+                  <a:schemeClr val="tx1"/>
+                </a:solidFill>
+                <a:effectLst/>
+                <a:latin typeface="Arial Unicode MS"/>
+              </a:rPr>
+              <a:t>df.count()</a:t>
+            </a:r>
+            <a:br>
+              <a:rPr kumimoji="0" lang="de-DE" altLang="de-DE" sz="200" b="0" i="0" u="none" strike="noStrike" cap="none" normalizeH="0" baseline="0">
+                <a:ln>
+                  <a:noFill/>
+                </a:ln>
+                <a:solidFill>
+                  <a:schemeClr val="tx1"/>
+                </a:solidFill>
+                <a:effectLst/>
+              </a:rPr>
+            </a:br>
+            <a:r>
+              <a:rPr kumimoji="0" lang="de-DE" altLang="de-DE" sz="200" b="0" i="0" u="none" strike="noStrike" cap="none" normalizeH="0" baseline="0">
+                <a:ln>
+                  <a:noFill/>
+                </a:ln>
+                <a:solidFill>
+                  <a:schemeClr val="tx1"/>
+                </a:solidFill>
+                <a:effectLst/>
+              </a:rPr>
+              <a:t>gives the number of non-missing values in each column.</a:t>
+            </a:r>
+            <a:endParaRPr kumimoji="0" lang="de-DE" altLang="de-DE" sz="1800" b="0" i="0" u="none" strike="noStrike" cap="none" normalizeH="0" baseline="0">
+              <a:ln>
+                <a:noFill/>
+              </a:ln>
+              <a:solidFill>
+                <a:schemeClr val="tx1"/>
+              </a:solidFill>
+              <a:effectLst/>
+              <a:latin typeface="Arial" panose="020B0604020202020204" pitchFamily="34" charset="0"/>
+            </a:endParaRPr>
+          </a:p>
+          <a:p>
+            <a:pPr marL="0" marR="0" lvl="0" indent="0" algn="l" defTabSz="914400" rtl="0" eaLnBrk="0" fontAlgn="base" latinLnBrk="0" hangingPunct="0">
+              <a:lnSpc>
+                <a:spcPct val="100000"/>
+              </a:lnSpc>
+              <a:spcBef>
+                <a:spcPct val="0"/>
+              </a:spcBef>
+              <a:spcAft>
+                <a:spcPct val="0"/>
+              </a:spcAft>
+              <a:buClrTx/>
+              <a:buSzTx/>
+              <a:buFontTx/>
+              <a:buChar char="•"/>
+              <a:tabLst/>
+            </a:pPr>
+            <a:r>
+              <a:rPr kumimoji="0" lang="de-DE" altLang="de-DE" sz="1000" b="0" i="0" u="none" strike="noStrike" cap="none" normalizeH="0" baseline="0">
+                <a:ln>
+                  <a:noFill/>
+                </a:ln>
+                <a:solidFill>
+                  <a:schemeClr val="tx1"/>
+                </a:solidFill>
+                <a:effectLst/>
+                <a:latin typeface="Arial Unicode MS"/>
+              </a:rPr>
+              <a:t>df.shape[0]</a:t>
+            </a:r>
+            <a:br>
+              <a:rPr kumimoji="0" lang="de-DE" altLang="de-DE" sz="200" b="0" i="0" u="none" strike="noStrike" cap="none" normalizeH="0" baseline="0">
+                <a:ln>
+                  <a:noFill/>
+                </a:ln>
+                <a:solidFill>
+                  <a:schemeClr val="tx1"/>
+                </a:solidFill>
+                <a:effectLst/>
+              </a:rPr>
+            </a:br>
+            <a:r>
+              <a:rPr kumimoji="0" lang="de-DE" altLang="de-DE" sz="200" b="0" i="0" u="none" strike="noStrike" cap="none" normalizeH="0" baseline="0">
+                <a:ln>
+                  <a:noFill/>
+                </a:ln>
+                <a:solidFill>
+                  <a:schemeClr val="tx1"/>
+                </a:solidFill>
+                <a:effectLst/>
+              </a:rPr>
+              <a:t>gives the total number of rows in the DataFrame.</a:t>
+            </a:r>
+            <a:endParaRPr kumimoji="0" lang="de-DE" altLang="de-DE" sz="1800" b="0" i="0" u="none" strike="noStrike" cap="none" normalizeH="0" baseline="0">
+              <a:ln>
+                <a:noFill/>
+              </a:ln>
+              <a:solidFill>
+                <a:schemeClr val="tx1"/>
+              </a:solidFill>
+              <a:effectLst/>
+              <a:latin typeface="Arial" panose="020B0604020202020204" pitchFamily="34" charset="0"/>
+            </a:endParaRPr>
+          </a:p>
+        </p:txBody>
+      </p:sp>
+      <p:sp>
+        <p:nvSpPr>
+          <p:cNvPr id="3" name="Rectangle 2">
+            <a:extLst>
+              <a:ext uri="{FF2B5EF4-FFF2-40B4-BE49-F238E27FC236}">
+                <a16:creationId xmlns:a16="http://schemas.microsoft.com/office/drawing/2014/main" id="{5F035887-0277-5A7D-BF61-E4760EDE6DCC}"/>
+              </a:ext>
+            </a:extLst>
+          </p:cNvPr>
+          <p:cNvSpPr>
+            <a:spLocks noChangeArrowheads="1"/>
+          </p:cNvSpPr>
+          <p:nvPr/>
+        </p:nvSpPr>
+        <p:spPr bwMode="auto">
+          <a:xfrm>
+            <a:off x="152400" y="152400"/>
+            <a:ext cx="9144000" cy="0"/>
+          </a:xfrm>
+          <a:prstGeom prst="rect">
+            <a:avLst/>
+          </a:prstGeom>
+          <a:noFill/>
+          <a:ln>
+            <a:noFill/>
+          </a:ln>
+          <a:effectLst/>
+          <a:extLst>
+            <a:ext uri="{909E8E84-426E-40DD-AFC4-6F175D3DCCD1}">
+              <a14:hiddenFill xmlns:a14="http://schemas.microsoft.com/office/drawing/2010/main">
+                <a:solidFill>
+                  <a:schemeClr val="accent1"/>
+                </a:solidFill>
+              </a14:hiddenFill>
+            </a:ext>
+            <a:ext uri="{91240B29-F687-4F45-9708-019B960494DF}">
+              <a14:hiddenLine xmlns:a14="http://schemas.microsoft.com/office/drawing/2010/main" w="9525">
+                <a:solidFill>
+                  <a:schemeClr val="tx1"/>
+                </a:solidFill>
+                <a:miter lim="800000"/>
+                <a:headEnd/>
+                <a:tailEnd/>
+              </a14:hiddenLine>
+            </a:ext>
+            <a:ext uri="{AF507438-7753-43E0-B8FC-AC1667EBCBE1}">
+              <a14:hiddenEffects xmlns:a14="http://schemas.microsoft.com/office/drawing/2010/main">
+                <a:effectLst>
+                  <a:outerShdw dist="35921" dir="2700000" algn="ctr" rotWithShape="0">
+                    <a:schemeClr val="bg2"/>
+                  </a:outerShdw>
+                </a:effectLst>
+              </a14:hiddenEffects>
+            </a:ext>
+          </a:extLst>
+        </p:spPr>
+        <p:txBody>
+          <a:bodyPr vert="horz" wrap="none" lIns="91440" tIns="45720" rIns="91440" bIns="45720" numCol="1" anchor="ctr" anchorCtr="0" compatLnSpc="1">
+            <a:prstTxWarp prst="textNoShape">
+              <a:avLst/>
+            </a:prstTxWarp>
+            <a:spAutoFit/>
+          </a:bodyPr>
+          <a:lstStyle/>
+          <a:p>
+            <a:pPr marL="0" marR="0" lvl="0" indent="0" algn="l" defTabSz="914400" rtl="0" eaLnBrk="0" fontAlgn="base" latinLnBrk="0" hangingPunct="0">
+              <a:lnSpc>
+                <a:spcPct val="100000"/>
+              </a:lnSpc>
+              <a:spcBef>
+                <a:spcPct val="0"/>
+              </a:spcBef>
+              <a:spcAft>
+                <a:spcPct val="0"/>
+              </a:spcAft>
+              <a:buClrTx/>
+              <a:buSzTx/>
+              <a:buFontTx/>
+              <a:buChar char="•"/>
+              <a:tabLst/>
+            </a:pPr>
+            <a:r>
+              <a:rPr kumimoji="0" lang="de-DE" altLang="de-DE" sz="1000" b="0" i="0" u="none" strike="noStrike" cap="none" normalizeH="0" baseline="0">
+                <a:ln>
+                  <a:noFill/>
+                </a:ln>
+                <a:solidFill>
+                  <a:schemeClr val="tx1"/>
+                </a:solidFill>
+                <a:effectLst/>
+                <a:latin typeface="Arial Unicode MS"/>
+              </a:rPr>
+              <a:t>df.isnull().sum()</a:t>
+            </a:r>
+            <a:br>
+              <a:rPr kumimoji="0" lang="de-DE" altLang="de-DE" sz="200" b="0" i="0" u="none" strike="noStrike" cap="none" normalizeH="0" baseline="0">
+                <a:ln>
+                  <a:noFill/>
+                </a:ln>
+                <a:solidFill>
+                  <a:schemeClr val="tx1"/>
+                </a:solidFill>
+                <a:effectLst/>
+              </a:rPr>
+            </a:br>
+            <a:r>
+              <a:rPr kumimoji="0" lang="de-DE" altLang="de-DE" sz="200" b="0" i="0" u="none" strike="noStrike" cap="none" normalizeH="0" baseline="0">
+                <a:ln>
+                  <a:noFill/>
+                </a:ln>
+                <a:solidFill>
+                  <a:schemeClr val="tx1"/>
+                </a:solidFill>
+                <a:effectLst/>
+              </a:rPr>
+              <a:t>gives the number of missing values (NaN) in each column.</a:t>
+            </a:r>
+            <a:endParaRPr kumimoji="0" lang="de-DE" altLang="de-DE" sz="1800" b="0" i="0" u="none" strike="noStrike" cap="none" normalizeH="0" baseline="0">
+              <a:ln>
+                <a:noFill/>
+              </a:ln>
+              <a:solidFill>
+                <a:schemeClr val="tx1"/>
+              </a:solidFill>
+              <a:effectLst/>
+              <a:latin typeface="Arial" panose="020B0604020202020204" pitchFamily="34" charset="0"/>
+            </a:endParaRPr>
+          </a:p>
+          <a:p>
+            <a:pPr marL="0" marR="0" lvl="0" indent="0" algn="l" defTabSz="914400" rtl="0" eaLnBrk="0" fontAlgn="base" latinLnBrk="0" hangingPunct="0">
+              <a:lnSpc>
+                <a:spcPct val="100000"/>
+              </a:lnSpc>
+              <a:spcBef>
+                <a:spcPct val="0"/>
+              </a:spcBef>
+              <a:spcAft>
+                <a:spcPct val="0"/>
+              </a:spcAft>
+              <a:buClrTx/>
+              <a:buSzTx/>
+              <a:buFontTx/>
+              <a:buChar char="•"/>
+              <a:tabLst/>
+            </a:pPr>
+            <a:r>
+              <a:rPr kumimoji="0" lang="de-DE" altLang="de-DE" sz="1000" b="0" i="0" u="none" strike="noStrike" cap="none" normalizeH="0" baseline="0">
+                <a:ln>
+                  <a:noFill/>
+                </a:ln>
+                <a:solidFill>
+                  <a:schemeClr val="tx1"/>
+                </a:solidFill>
+                <a:effectLst/>
+                <a:latin typeface="Arial Unicode MS"/>
+              </a:rPr>
+              <a:t>df.count()</a:t>
+            </a:r>
+            <a:br>
+              <a:rPr kumimoji="0" lang="de-DE" altLang="de-DE" sz="200" b="0" i="0" u="none" strike="noStrike" cap="none" normalizeH="0" baseline="0">
+                <a:ln>
+                  <a:noFill/>
+                </a:ln>
+                <a:solidFill>
+                  <a:schemeClr val="tx1"/>
+                </a:solidFill>
+                <a:effectLst/>
+              </a:rPr>
+            </a:br>
+            <a:r>
+              <a:rPr kumimoji="0" lang="de-DE" altLang="de-DE" sz="200" b="0" i="0" u="none" strike="noStrike" cap="none" normalizeH="0" baseline="0">
+                <a:ln>
+                  <a:noFill/>
+                </a:ln>
+                <a:solidFill>
+                  <a:schemeClr val="tx1"/>
+                </a:solidFill>
+                <a:effectLst/>
+              </a:rPr>
+              <a:t>gives the number of non-missing values in each column.</a:t>
+            </a:r>
+            <a:endParaRPr kumimoji="0" lang="de-DE" altLang="de-DE" sz="1800" b="0" i="0" u="none" strike="noStrike" cap="none" normalizeH="0" baseline="0">
+              <a:ln>
+                <a:noFill/>
+              </a:ln>
+              <a:solidFill>
+                <a:schemeClr val="tx1"/>
+              </a:solidFill>
+              <a:effectLst/>
+              <a:latin typeface="Arial" panose="020B0604020202020204" pitchFamily="34" charset="0"/>
+            </a:endParaRPr>
+          </a:p>
+          <a:p>
+            <a:pPr marL="0" marR="0" lvl="0" indent="0" algn="l" defTabSz="914400" rtl="0" eaLnBrk="0" fontAlgn="base" latinLnBrk="0" hangingPunct="0">
+              <a:lnSpc>
+                <a:spcPct val="100000"/>
+              </a:lnSpc>
+              <a:spcBef>
+                <a:spcPct val="0"/>
+              </a:spcBef>
+              <a:spcAft>
+                <a:spcPct val="0"/>
+              </a:spcAft>
+              <a:buClrTx/>
+              <a:buSzTx/>
+              <a:buFontTx/>
+              <a:buChar char="•"/>
+              <a:tabLst/>
+            </a:pPr>
+            <a:r>
+              <a:rPr kumimoji="0" lang="de-DE" altLang="de-DE" sz="1000" b="0" i="0" u="none" strike="noStrike" cap="none" normalizeH="0" baseline="0">
+                <a:ln>
+                  <a:noFill/>
+                </a:ln>
+                <a:solidFill>
+                  <a:schemeClr val="tx1"/>
+                </a:solidFill>
+                <a:effectLst/>
+                <a:latin typeface="Arial Unicode MS"/>
+              </a:rPr>
+              <a:t>df.shape[0]</a:t>
+            </a:r>
+            <a:br>
+              <a:rPr kumimoji="0" lang="de-DE" altLang="de-DE" sz="200" b="0" i="0" u="none" strike="noStrike" cap="none" normalizeH="0" baseline="0">
+                <a:ln>
+                  <a:noFill/>
+                </a:ln>
+                <a:solidFill>
+                  <a:schemeClr val="tx1"/>
+                </a:solidFill>
+                <a:effectLst/>
+              </a:rPr>
+            </a:br>
+            <a:r>
+              <a:rPr kumimoji="0" lang="de-DE" altLang="de-DE" sz="200" b="0" i="0" u="none" strike="noStrike" cap="none" normalizeH="0" baseline="0">
+                <a:ln>
+                  <a:noFill/>
+                </a:ln>
+                <a:solidFill>
+                  <a:schemeClr val="tx1"/>
+                </a:solidFill>
+                <a:effectLst/>
+              </a:rPr>
+              <a:t>gives the total number of rows in the DataFrame.</a:t>
+            </a:r>
+            <a:endParaRPr kumimoji="0" lang="de-DE" altLang="de-DE" sz="1800" b="0" i="0" u="none" strike="noStrike" cap="none" normalizeH="0" baseline="0">
+              <a:ln>
+                <a:noFill/>
+              </a:ln>
+              <a:solidFill>
+                <a:schemeClr val="tx1"/>
+              </a:solidFill>
+              <a:effectLst/>
+              <a:latin typeface="Arial" panose="020B0604020202020204" pitchFamily="34" charset="0"/>
+            </a:endParaRPr>
+          </a:p>
+        </p:txBody>
+      </p:sp>
+    </p:spTree>
+    <p:extLst>
+      <p:ext uri="{BB962C8B-B14F-4D97-AF65-F5344CB8AC3E}">
+        <p14:creationId xmlns:p14="http://schemas.microsoft.com/office/powerpoint/2010/main" val="3369957238"/>
+      </p:ext>
+    </p:extLst>
+  </p:cSld>
+  <p:clrMapOvr>
+    <a:overrideClrMapping bg1="lt1" tx1="dk1" bg2="dk2" tx2="lt2" accent1="accent1" accent2="accent2" accent3="accent3" accent4="accent4" accent5="accent5" accent6="accent6" hlink="hlink" folHlink="folHlink"/>
+  </p:clrMapOvr>
+</p:sld>
+</file>
+
+<file path=ppt/slides/slide19.xml><?xml version="1.0" encoding="utf-8"?>
 <p:sld xmlns:a="http://schemas.openxmlformats.org/drawingml/2006/main" xmlns:r="http://schemas.openxmlformats.org/officeDocument/2006/relationships" xmlns:p="http://schemas.openxmlformats.org/presentationml/2006/main">
   <p:cSld>
     <p:spTree>
@@ -14263,4 +17216,133 @@
   <a:objectDefaults/>
   <a:extraClrSchemeLst/>
 </a:theme>
+</file>
+
+<file path=ppt/theme/themeOverride1.xml><?xml version="1.0" encoding="utf-8"?>
+<a:themeOverride xmlns:a="http://schemas.openxmlformats.org/drawingml/2006/main">
+  <a:clrScheme name="Simple Light">
+    <a:dk1>
+      <a:srgbClr val="FFFFFF"/>
+    </a:dk1>
+    <a:lt1>
+      <a:srgbClr val="0A3455"/>
+    </a:lt1>
+    <a:dk2>
+      <a:srgbClr val="6EBDC4"/>
+    </a:dk2>
+    <a:lt2>
+      <a:srgbClr val="416D90"/>
+    </a:lt2>
+    <a:accent1>
+      <a:srgbClr val="B4EBF0"/>
+    </a:accent1>
+    <a:accent2>
+      <a:srgbClr val="7CC5CC"/>
+    </a:accent2>
+    <a:accent3>
+      <a:srgbClr val="61A6B5"/>
+    </a:accent3>
+    <a:accent4>
+      <a:srgbClr val="548FA6"/>
+    </a:accent4>
+    <a:accent5>
+      <a:srgbClr val="2E5F80"/>
+    </a:accent5>
+    <a:accent6>
+      <a:srgbClr val="174366"/>
+    </a:accent6>
+    <a:hlink>
+      <a:srgbClr val="FFFFFF"/>
+    </a:hlink>
+    <a:folHlink>
+      <a:srgbClr val="0097A7"/>
+    </a:folHlink>
+  </a:clrScheme>
+</a:themeOverride>
+</file>
+
+<file path=ppt/theme/themeOverride2.xml><?xml version="1.0" encoding="utf-8"?>
+<a:themeOverride xmlns:a="http://schemas.openxmlformats.org/drawingml/2006/main">
+  <a:clrScheme name="Simple Light">
+    <a:dk1>
+      <a:srgbClr val="FFFFFF"/>
+    </a:dk1>
+    <a:lt1>
+      <a:srgbClr val="0A3455"/>
+    </a:lt1>
+    <a:dk2>
+      <a:srgbClr val="6EBDC4"/>
+    </a:dk2>
+    <a:lt2>
+      <a:srgbClr val="416D90"/>
+    </a:lt2>
+    <a:accent1>
+      <a:srgbClr val="B4EBF0"/>
+    </a:accent1>
+    <a:accent2>
+      <a:srgbClr val="7CC5CC"/>
+    </a:accent2>
+    <a:accent3>
+      <a:srgbClr val="61A6B5"/>
+    </a:accent3>
+    <a:accent4>
+      <a:srgbClr val="548FA6"/>
+    </a:accent4>
+    <a:accent5>
+      <a:srgbClr val="2E5F80"/>
+    </a:accent5>
+    <a:accent6>
+      <a:srgbClr val="174366"/>
+    </a:accent6>
+    <a:hlink>
+      <a:srgbClr val="FFFFFF"/>
+    </a:hlink>
+    <a:folHlink>
+      <a:srgbClr val="0097A7"/>
+    </a:folHlink>
+  </a:clrScheme>
+</a:themeOverride>
+</file>
+
+<file path=ppt/theme/themeOverride3.xml><?xml version="1.0" encoding="utf-8"?>
+<a:themeOverride xmlns:a="http://schemas.openxmlformats.org/drawingml/2006/main">
+  <a:clrScheme name="Simple Light">
+    <a:dk1>
+      <a:srgbClr val="FFFFFF"/>
+    </a:dk1>
+    <a:lt1>
+      <a:srgbClr val="0A3455"/>
+    </a:lt1>
+    <a:dk2>
+      <a:srgbClr val="6EBDC4"/>
+    </a:dk2>
+    <a:lt2>
+      <a:srgbClr val="416D90"/>
+    </a:lt2>
+    <a:accent1>
+      <a:srgbClr val="B4EBF0"/>
+    </a:accent1>
+    <a:accent2>
+      <a:srgbClr val="7CC5CC"/>
+    </a:accent2>
+    <a:accent3>
+      <a:srgbClr val="61A6B5"/>
+    </a:accent3>
+    <a:accent4>
+      <a:srgbClr val="548FA6"/>
+    </a:accent4>
+    <a:accent5>
+      <a:srgbClr val="2E5F80"/>
+    </a:accent5>
+    <a:accent6>
+      <a:srgbClr val="174366"/>
+    </a:accent6>
+    <a:hlink>
+      <a:srgbClr val="FFFFFF"/>
+    </a:hlink>
+    <a:folHlink>
+      <a:srgbClr val="0097A7"/>
+    </a:folHlink>
+  </a:clrScheme>
+</a:themeOverride>
 </file>